--- a/analysis_package/figures/publication/Patni_et_al_2026_Protein_Bacteriocin_Mechanism.pptx
+++ b/analysis_package/figures/publication/Patni_et_al_2026_Protein_Bacteriocin_Mechanism.pptx
@@ -2,13 +2,13 @@
 <file path=ppt/presentation.xml><?xml version="1.0" encoding="utf-8"?>
 <p:presentation xmlns:p="http://schemas.openxmlformats.org/presentationml/2006/main">
   <p:sldMasterIdLst>
-    <p:sldMasterId xmlns:r="http://schemas.openxmlformats.org/officeDocument/2006/relationships" id="2147483648" r:id="Ra9b906c95c0c4714"/>
+    <p:sldMasterId xmlns:r="http://schemas.openxmlformats.org/officeDocument/2006/relationships" id="2147483648" r:id="Rd1dd4261f7264084"/>
   </p:sldMasterIdLst>
   <p:notesMasterIdLst>
-    <p:notesMasterId xmlns:r="http://schemas.openxmlformats.org/officeDocument/2006/relationships" r:id="R7011e2618b4e4f5f"/>
+    <p:notesMasterId xmlns:r="http://schemas.openxmlformats.org/officeDocument/2006/relationships" r:id="R38e7955117f849ec"/>
   </p:notesMasterIdLst>
   <p:sldIdLst>
-    <p:sldId xmlns:r="http://schemas.openxmlformats.org/officeDocument/2006/relationships" id="256" r:id="R8a6a530aecc54ea1"/>
+    <p:sldId xmlns:r="http://schemas.openxmlformats.org/officeDocument/2006/relationships" id="256" r:id="R4371afc9651f4a88"/>
   </p:sldIdLst>
   <p:sldSz cx="12192000" cy="6858000"/>
   <p:notesSz cx="6858000" cy="9144000"/>
@@ -535,7 +535,7 @@
   </p:cSld>
   <p:clrMap bg1="lt1" tx1="dk1" bg2="lt2" tx2="dk2" accent1="accent1" accent2="accent2" accent3="accent3" accent4="accent4" accent5="accent5" accent6="accent6" hlink="hlink" folHlink="folHlink"/>
   <p:sldLayoutIdLst>
-    <p:sldLayoutId xmlns:r="http://schemas.openxmlformats.org/officeDocument/2006/relationships" id="2147483649" r:id="Rdfe208f1c66143a4"/>
+    <p:sldLayoutId xmlns:r="http://schemas.openxmlformats.org/officeDocument/2006/relationships" id="2147483649" r:id="R68fe786cf1c647e4"/>
   </p:sldLayoutIdLst>
   <p:txStyles>
     <p:titleStyle>
@@ -1083,10 +1083,10 @@
       </p:grpSpPr>
       <p:sp>
         <p:nvSpPr>
-          <p:cNvPr id="48" name="title">
-            <a:extLst xmlns:a="http://schemas.openxmlformats.org/drawingml/2006/main">
-              <a:ext uri="{FF2B5EF4-FFF2-40B4-BE49-F238E27FC236}">
-                <a16:creationId xmlns:a16="http://schemas.microsoft.com/office/drawing/2014/main" id="{2C9FD162-E703-4DE0-9BDB-360650E3B339}"/>
+          <p:cNvPr id="54" name="title">
+            <a:extLst xmlns:a="http://schemas.openxmlformats.org/drawingml/2006/main">
+              <a:ext uri="{FF2B5EF4-FFF2-40B4-BE49-F238E27FC236}">
+                <a16:creationId xmlns:a16="http://schemas.microsoft.com/office/drawing/2014/main" id="{C1F9FCA6-CDDF-47F4-BBED-AEBB60083A2C}"/>
               </a:ext>
             </a:extLst>
           </p:cNvPr>
@@ -1136,7 +1136,7 @@
           <p:cNvPr id="2" name="outside-label">
             <a:extLst xmlns:a="http://schemas.openxmlformats.org/drawingml/2006/main">
               <a:ext uri="{FF2B5EF4-FFF2-40B4-BE49-F238E27FC236}">
-                <a16:creationId xmlns:a16="http://schemas.microsoft.com/office/drawing/2014/main" id="{523D3BDF-1448-4FB0-AB1A-90098C7AAEC4}"/>
+                <a16:creationId xmlns:a16="http://schemas.microsoft.com/office/drawing/2014/main" id="{D102281A-CEFD-4122-ACA5-930E6117A13E}"/>
               </a:ext>
             </a:extLst>
           </p:cNvPr>
@@ -1186,7 +1186,7 @@
           <p:cNvPr id="3" name="periplasm-label">
             <a:extLst xmlns:a="http://schemas.openxmlformats.org/drawingml/2006/main">
               <a:ext uri="{FF2B5EF4-FFF2-40B4-BE49-F238E27FC236}">
-                <a16:creationId xmlns:a16="http://schemas.microsoft.com/office/drawing/2014/main" id="{BC31415B-2E2B-4201-836A-DB1A2A298771}"/>
+                <a16:creationId xmlns:a16="http://schemas.microsoft.com/office/drawing/2014/main" id="{5735FA83-2374-4F74-8DBF-2B8C00C0BB4F}"/>
               </a:ext>
             </a:extLst>
           </p:cNvPr>
@@ -1236,7 +1236,7 @@
           <p:cNvPr id="4" name="cytoplasm-label">
             <a:extLst xmlns:a="http://schemas.openxmlformats.org/drawingml/2006/main">
               <a:ext uri="{FF2B5EF4-FFF2-40B4-BE49-F238E27FC236}">
-                <a16:creationId xmlns:a16="http://schemas.microsoft.com/office/drawing/2014/main" id="{5C722BF2-1429-4B73-8462-6C08A8F24681}"/>
+                <a16:creationId xmlns:a16="http://schemas.microsoft.com/office/drawing/2014/main" id="{199F8F32-1E0B-4BD4-BD08-7B5B02D6B631}"/>
               </a:ext>
             </a:extLst>
           </p:cNvPr>
@@ -1286,7 +1286,7 @@
           <p:cNvPr id="5" name="outer-membrane-top">
             <a:extLst xmlns:a="http://schemas.openxmlformats.org/drawingml/2006/main">
               <a:ext uri="{FF2B5EF4-FFF2-40B4-BE49-F238E27FC236}">
-                <a16:creationId xmlns:a16="http://schemas.microsoft.com/office/drawing/2014/main" id="{B3AA82D8-A887-4333-BE1F-79652E91E629}"/>
+                <a16:creationId xmlns:a16="http://schemas.microsoft.com/office/drawing/2014/main" id="{11A3086C-404C-45E2-8FAB-5AC159772728}"/>
               </a:ext>
             </a:extLst>
           </p:cNvPr>
@@ -1319,7 +1319,7 @@
           <p:cNvPr id="6" name="outer-membrane-bottom">
             <a:extLst xmlns:a="http://schemas.openxmlformats.org/drawingml/2006/main">
               <a:ext uri="{FF2B5EF4-FFF2-40B4-BE49-F238E27FC236}">
-                <a16:creationId xmlns:a16="http://schemas.microsoft.com/office/drawing/2014/main" id="{16CFEB47-8848-47F6-906A-F247E25859CF}"/>
+                <a16:creationId xmlns:a16="http://schemas.microsoft.com/office/drawing/2014/main" id="{37666FF1-5889-4758-9318-A98E41D0E87C}"/>
               </a:ext>
             </a:extLst>
           </p:cNvPr>
@@ -1352,7 +1352,7 @@
           <p:cNvPr id="7" name="outer-membrane-label">
             <a:extLst xmlns:a="http://schemas.openxmlformats.org/drawingml/2006/main">
               <a:ext uri="{FF2B5EF4-FFF2-40B4-BE49-F238E27FC236}">
-                <a16:creationId xmlns:a16="http://schemas.microsoft.com/office/drawing/2014/main" id="{76F7DFC9-E9C6-4960-AB65-539003F93CAE}"/>
+                <a16:creationId xmlns:a16="http://schemas.microsoft.com/office/drawing/2014/main" id="{A5653FF8-1543-4F9A-80F2-CDB594F7313F}"/>
               </a:ext>
             </a:extLst>
           </p:cNvPr>
@@ -1402,7 +1402,7 @@
           <p:cNvPr id="8" name="inner-membrane-top">
             <a:extLst xmlns:a="http://schemas.openxmlformats.org/drawingml/2006/main">
               <a:ext uri="{FF2B5EF4-FFF2-40B4-BE49-F238E27FC236}">
-                <a16:creationId xmlns:a16="http://schemas.microsoft.com/office/drawing/2014/main" id="{687E23C6-D06A-433A-8AFF-831E1377FFCA}"/>
+                <a16:creationId xmlns:a16="http://schemas.microsoft.com/office/drawing/2014/main" id="{797714E4-8213-457A-8A17-BB3D09953FD8}"/>
               </a:ext>
             </a:extLst>
           </p:cNvPr>
@@ -1435,7 +1435,7 @@
           <p:cNvPr id="9" name="inner-membrane-bottom">
             <a:extLst xmlns:a="http://schemas.openxmlformats.org/drawingml/2006/main">
               <a:ext uri="{FF2B5EF4-FFF2-40B4-BE49-F238E27FC236}">
-                <a16:creationId xmlns:a16="http://schemas.microsoft.com/office/drawing/2014/main" id="{FB7C0B0F-057A-49B1-89BB-14E5212FE855}"/>
+                <a16:creationId xmlns:a16="http://schemas.microsoft.com/office/drawing/2014/main" id="{28329AF5-3174-4D20-B770-E8B2E40AEC27}"/>
               </a:ext>
             </a:extLst>
           </p:cNvPr>
@@ -1468,7 +1468,7 @@
           <p:cNvPr id="10" name="inner-membrane-label">
             <a:extLst xmlns:a="http://schemas.openxmlformats.org/drawingml/2006/main">
               <a:ext uri="{FF2B5EF4-FFF2-40B4-BE49-F238E27FC236}">
-                <a16:creationId xmlns:a16="http://schemas.microsoft.com/office/drawing/2014/main" id="{571A5B4E-BE11-4F57-8179-73BAEEC8C22E}"/>
+                <a16:creationId xmlns:a16="http://schemas.microsoft.com/office/drawing/2014/main" id="{44920AF5-45C8-4052-999E-59F261645219}"/>
               </a:ext>
             </a:extLst>
           </p:cNvPr>
@@ -1518,7 +1518,7 @@
           <p:cNvPr id="11" name="binding-arrow">
             <a:extLst xmlns:a="http://schemas.openxmlformats.org/drawingml/2006/main">
               <a:ext uri="{FF2B5EF4-FFF2-40B4-BE49-F238E27FC236}">
-                <a16:creationId xmlns:a16="http://schemas.microsoft.com/office/drawing/2014/main" id="{9AC3DACF-3AF7-458C-A4E8-596C1AD6845E}"/>
+                <a16:creationId xmlns:a16="http://schemas.microsoft.com/office/drawing/2014/main" id="{65A8AC29-2C6D-48AB-99E0-4CC78280FC69}"/>
               </a:ext>
             </a:extLst>
           </p:cNvPr>
@@ -1551,7 +1551,7 @@
           <p:cNvPr id="12" name="import-arrow">
             <a:extLst xmlns:a="http://schemas.openxmlformats.org/drawingml/2006/main">
               <a:ext uri="{FF2B5EF4-FFF2-40B4-BE49-F238E27FC236}">
-                <a16:creationId xmlns:a16="http://schemas.microsoft.com/office/drawing/2014/main" id="{EFC436DF-6F77-4D4C-BA6C-434EEEE618E6}"/>
+                <a16:creationId xmlns:a16="http://schemas.microsoft.com/office/drawing/2014/main" id="{AB2EB10A-F0DC-453F-9EE3-783CACCE354E}"/>
               </a:ext>
             </a:extLst>
           </p:cNvPr>
@@ -1581,55 +1581,22 @@
       </p:sp>
       <p:sp>
         <p:nvSpPr>
-          <p:cNvPr id="13" name="delivery-arrow">
-            <a:extLst xmlns:a="http://schemas.openxmlformats.org/drawingml/2006/main">
-              <a:ext uri="{FF2B5EF4-FFF2-40B4-BE49-F238E27FC236}">
-                <a16:creationId xmlns:a16="http://schemas.microsoft.com/office/drawing/2014/main" id="{7440E304-2439-4C0B-8DAD-851F32B2573E}"/>
-              </a:ext>
-            </a:extLst>
-          </p:cNvPr>
-          <p:cNvSpPr>
-            <a:spLocks xmlns:a="http://schemas.openxmlformats.org/drawingml/2006/main" noGrp="1"/>
-          </p:cNvSpPr>
-          <p:nvPr/>
-        </p:nvSpPr>
-        <p:spPr>
-          <a:xfrm xmlns:a="http://schemas.openxmlformats.org/drawingml/2006/main">
-            <a:off x="6076950" y="5486400"/>
-            <a:ext cx="1085850" cy="381000"/>
-          </a:xfrm>
-          <a:prstGeom xmlns:a="http://schemas.openxmlformats.org/drawingml/2006/main" prst="rightArrow">
-            <a:avLst/>
-          </a:prstGeom>
-          <a:solidFill xmlns:a="http://schemas.openxmlformats.org/drawingml/2006/main">
-            <a:srgbClr val="D5DEE8"/>
-          </a:solidFill>
-          <a:ln xmlns:a="http://schemas.openxmlformats.org/drawingml/2006/main" w="11430">
-            <a:solidFill>
-              <a:srgbClr val="526174"/>
-            </a:solidFill>
-            <a:prstDash val="solid"/>
-          </a:ln>
-        </p:spPr>
-      </p:sp>
-      <p:sp>
-        <p:nvSpPr>
-          <p:cNvPr id="14" name="effects-arrow">
-            <a:extLst xmlns:a="http://schemas.openxmlformats.org/drawingml/2006/main">
-              <a:ext uri="{FF2B5EF4-FFF2-40B4-BE49-F238E27FC236}">
-                <a16:creationId xmlns:a16="http://schemas.microsoft.com/office/drawing/2014/main" id="{E78820FD-0597-42C8-B902-0F3CE67A09C4}"/>
-              </a:ext>
-            </a:extLst>
-          </p:cNvPr>
-          <p:cNvSpPr>
-            <a:spLocks xmlns:a="http://schemas.openxmlformats.org/drawingml/2006/main" noGrp="1"/>
-          </p:cNvSpPr>
-          <p:nvPr/>
-        </p:nvSpPr>
-        <p:spPr>
-          <a:xfrm xmlns:a="http://schemas.openxmlformats.org/drawingml/2006/main">
-            <a:off x="7658100" y="5505450"/>
-            <a:ext cx="685800" cy="342900"/>
+          <p:cNvPr id="13" name="periplasm-route">
+            <a:extLst xmlns:a="http://schemas.openxmlformats.org/drawingml/2006/main">
+              <a:ext uri="{FF2B5EF4-FFF2-40B4-BE49-F238E27FC236}">
+                <a16:creationId xmlns:a16="http://schemas.microsoft.com/office/drawing/2014/main" id="{4C10D334-D5C4-4EFD-BA79-2458A1C67CB1}"/>
+              </a:ext>
+            </a:extLst>
+          </p:cNvPr>
+          <p:cNvSpPr>
+            <a:spLocks xmlns:a="http://schemas.openxmlformats.org/drawingml/2006/main" noGrp="1"/>
+          </p:cNvSpPr>
+          <p:nvPr/>
+        </p:nvSpPr>
+        <p:spPr>
+          <a:xfrm xmlns:a="http://schemas.openxmlformats.org/drawingml/2006/main">
+            <a:off x="6667500" y="3829050"/>
+            <a:ext cx="2266950" cy="323850"/>
           </a:xfrm>
           <a:prstGeom xmlns:a="http://schemas.openxmlformats.org/drawingml/2006/main" prst="rightArrow">
             <a:avLst/>
@@ -1647,10 +1614,76 @@
       </p:sp>
       <p:sp>
         <p:nvSpPr>
-          <p:cNvPr id="15" name="translocation-domain">
-            <a:extLst xmlns:a="http://schemas.openxmlformats.org/drawingml/2006/main">
-              <a:ext uri="{FF2B5EF4-FFF2-40B4-BE49-F238E27FC236}">
-                <a16:creationId xmlns:a16="http://schemas.microsoft.com/office/drawing/2014/main" id="{EF576B23-4A47-42BA-9465-85428F9238E5}"/>
+          <p:cNvPr id="14" name="pore-route">
+            <a:extLst xmlns:a="http://schemas.openxmlformats.org/drawingml/2006/main">
+              <a:ext uri="{FF2B5EF4-FFF2-40B4-BE49-F238E27FC236}">
+                <a16:creationId xmlns:a16="http://schemas.microsoft.com/office/drawing/2014/main" id="{A3897F75-9CC4-4DEB-88FC-89397318760B}"/>
+              </a:ext>
+            </a:extLst>
+          </p:cNvPr>
+          <p:cNvSpPr>
+            <a:spLocks xmlns:a="http://schemas.openxmlformats.org/drawingml/2006/main" noGrp="1"/>
+          </p:cNvSpPr>
+          <p:nvPr/>
+        </p:nvSpPr>
+        <p:spPr>
+          <a:xfrm xmlns:a="http://schemas.openxmlformats.org/drawingml/2006/main">
+            <a:off x="6667500" y="4619625"/>
+            <a:ext cx="1752600" cy="323850"/>
+          </a:xfrm>
+          <a:prstGeom xmlns:a="http://schemas.openxmlformats.org/drawingml/2006/main" prst="rightArrow">
+            <a:avLst/>
+          </a:prstGeom>
+          <a:solidFill xmlns:a="http://schemas.openxmlformats.org/drawingml/2006/main">
+            <a:srgbClr val="F6C36B"/>
+          </a:solidFill>
+          <a:ln xmlns:a="http://schemas.openxmlformats.org/drawingml/2006/main" w="10478">
+            <a:solidFill>
+              <a:srgbClr val="B66B13"/>
+            </a:solidFill>
+            <a:prstDash val="solid"/>
+          </a:ln>
+        </p:spPr>
+      </p:sp>
+      <p:sp>
+        <p:nvSpPr>
+          <p:cNvPr id="15" name="nuclease-route">
+            <a:extLst xmlns:a="http://schemas.openxmlformats.org/drawingml/2006/main">
+              <a:ext uri="{FF2B5EF4-FFF2-40B4-BE49-F238E27FC236}">
+                <a16:creationId xmlns:a16="http://schemas.microsoft.com/office/drawing/2014/main" id="{15CCEAA3-4F96-4247-938F-FAD0339E76CF}"/>
+              </a:ext>
+            </a:extLst>
+          </p:cNvPr>
+          <p:cNvSpPr>
+            <a:spLocks xmlns:a="http://schemas.openxmlformats.org/drawingml/2006/main" noGrp="1"/>
+          </p:cNvSpPr>
+          <p:nvPr/>
+        </p:nvSpPr>
+        <p:spPr>
+          <a:xfrm xmlns:a="http://schemas.openxmlformats.org/drawingml/2006/main">
+            <a:off x="6667500" y="5619750"/>
+            <a:ext cx="2152650" cy="323850"/>
+          </a:xfrm>
+          <a:prstGeom xmlns:a="http://schemas.openxmlformats.org/drawingml/2006/main" prst="rightArrow">
+            <a:avLst/>
+          </a:prstGeom>
+          <a:solidFill xmlns:a="http://schemas.openxmlformats.org/drawingml/2006/main">
+            <a:srgbClr val="F6C36B"/>
+          </a:solidFill>
+          <a:ln xmlns:a="http://schemas.openxmlformats.org/drawingml/2006/main" w="10478">
+            <a:solidFill>
+              <a:srgbClr val="B66B13"/>
+            </a:solidFill>
+            <a:prstDash val="solid"/>
+          </a:ln>
+        </p:spPr>
+      </p:sp>
+      <p:sp>
+        <p:nvSpPr>
+          <p:cNvPr id="16" name="translocation-domain">
+            <a:extLst xmlns:a="http://schemas.openxmlformats.org/drawingml/2006/main">
+              <a:ext uri="{FF2B5EF4-FFF2-40B4-BE49-F238E27FC236}">
+                <a16:creationId xmlns:a16="http://schemas.microsoft.com/office/drawing/2014/main" id="{0A17EB87-20CD-465F-9FE5-0966575F745B}"/>
               </a:ext>
             </a:extLst>
           </p:cNvPr>
@@ -1682,10 +1715,10 @@
       </p:sp>
       <p:sp>
         <p:nvSpPr>
-          <p:cNvPr id="16" name="binding-domain">
-            <a:extLst xmlns:a="http://schemas.openxmlformats.org/drawingml/2006/main">
-              <a:ext uri="{FF2B5EF4-FFF2-40B4-BE49-F238E27FC236}">
-                <a16:creationId xmlns:a16="http://schemas.microsoft.com/office/drawing/2014/main" id="{F2C2C7A0-AC7B-4668-B019-5F24134515FA}"/>
+          <p:cNvPr id="17" name="binding-domain">
+            <a:extLst xmlns:a="http://schemas.openxmlformats.org/drawingml/2006/main">
+              <a:ext uri="{FF2B5EF4-FFF2-40B4-BE49-F238E27FC236}">
+                <a16:creationId xmlns:a16="http://schemas.microsoft.com/office/drawing/2014/main" id="{00ED27EE-23C4-41B9-BF35-16773BD8C14E}"/>
               </a:ext>
             </a:extLst>
           </p:cNvPr>
@@ -1717,10 +1750,10 @@
       </p:sp>
       <p:sp>
         <p:nvSpPr>
-          <p:cNvPr id="17" name="killing-domain">
-            <a:extLst xmlns:a="http://schemas.openxmlformats.org/drawingml/2006/main">
-              <a:ext uri="{FF2B5EF4-FFF2-40B4-BE49-F238E27FC236}">
-                <a16:creationId xmlns:a16="http://schemas.microsoft.com/office/drawing/2014/main" id="{919A86BD-4AB5-47E2-B3D1-5159E87CA28F}"/>
+          <p:cNvPr id="18" name="killing-domain">
+            <a:extLst xmlns:a="http://schemas.openxmlformats.org/drawingml/2006/main">
+              <a:ext uri="{FF2B5EF4-FFF2-40B4-BE49-F238E27FC236}">
+                <a16:creationId xmlns:a16="http://schemas.microsoft.com/office/drawing/2014/main" id="{5F6D751F-68E2-4442-9C75-F2161DF4DCCB}"/>
               </a:ext>
             </a:extLst>
           </p:cNvPr>
@@ -1752,10 +1785,10 @@
       </p:sp>
       <p:sp>
         <p:nvSpPr>
-          <p:cNvPr id="18" name="translocation-domain-label">
-            <a:extLst xmlns:a="http://schemas.openxmlformats.org/drawingml/2006/main">
-              <a:ext uri="{FF2B5EF4-FFF2-40B4-BE49-F238E27FC236}">
-                <a16:creationId xmlns:a16="http://schemas.microsoft.com/office/drawing/2014/main" id="{FE68FBFC-F481-43DA-BF4F-DFF6F7704153}"/>
+          <p:cNvPr id="19" name="translocation-domain-label">
+            <a:extLst xmlns:a="http://schemas.openxmlformats.org/drawingml/2006/main">
+              <a:ext uri="{FF2B5EF4-FFF2-40B4-BE49-F238E27FC236}">
+                <a16:creationId xmlns:a16="http://schemas.microsoft.com/office/drawing/2014/main" id="{04846A58-B705-4B77-A168-4B1F1D177611}"/>
               </a:ext>
             </a:extLst>
           </p:cNvPr>
@@ -1802,10 +1835,10 @@
       </p:sp>
       <p:sp>
         <p:nvSpPr>
-          <p:cNvPr id="19" name="binding-domain-label">
-            <a:extLst xmlns:a="http://schemas.openxmlformats.org/drawingml/2006/main">
-              <a:ext uri="{FF2B5EF4-FFF2-40B4-BE49-F238E27FC236}">
-                <a16:creationId xmlns:a16="http://schemas.microsoft.com/office/drawing/2014/main" id="{58F32303-E05B-4902-8EB2-EDA68DAFC93D}"/>
+          <p:cNvPr id="20" name="binding-domain-label">
+            <a:extLst xmlns:a="http://schemas.openxmlformats.org/drawingml/2006/main">
+              <a:ext uri="{FF2B5EF4-FFF2-40B4-BE49-F238E27FC236}">
+                <a16:creationId xmlns:a16="http://schemas.microsoft.com/office/drawing/2014/main" id="{51A24EC1-6867-41CF-822D-409BC53D0A93}"/>
               </a:ext>
             </a:extLst>
           </p:cNvPr>
@@ -1852,10 +1885,10 @@
       </p:sp>
       <p:sp>
         <p:nvSpPr>
-          <p:cNvPr id="20" name="killing-domain-label">
-            <a:extLst xmlns:a="http://schemas.openxmlformats.org/drawingml/2006/main">
-              <a:ext uri="{FF2B5EF4-FFF2-40B4-BE49-F238E27FC236}">
-                <a16:creationId xmlns:a16="http://schemas.microsoft.com/office/drawing/2014/main" id="{B9AE6902-FB8B-47C7-8F58-52191E557774}"/>
+          <p:cNvPr id="21" name="killing-domain-label">
+            <a:extLst xmlns:a="http://schemas.openxmlformats.org/drawingml/2006/main">
+              <a:ext uri="{FF2B5EF4-FFF2-40B4-BE49-F238E27FC236}">
+                <a16:creationId xmlns:a16="http://schemas.microsoft.com/office/drawing/2014/main" id="{379C728C-035B-42FD-8263-FA0EDF76E248}"/>
               </a:ext>
             </a:extLst>
           </p:cNvPr>
@@ -1902,10 +1935,10 @@
       </p:sp>
       <p:sp>
         <p:nvSpPr>
-          <p:cNvPr id="21" name="bacteriocin-label">
-            <a:extLst xmlns:a="http://schemas.openxmlformats.org/drawingml/2006/main">
-              <a:ext uri="{FF2B5EF4-FFF2-40B4-BE49-F238E27FC236}">
-                <a16:creationId xmlns:a16="http://schemas.microsoft.com/office/drawing/2014/main" id="{65E2FC69-73B9-4F99-AEC6-1A67DE966693}"/>
+          <p:cNvPr id="22" name="bacteriocin-label">
+            <a:extLst xmlns:a="http://schemas.openxmlformats.org/drawingml/2006/main">
+              <a:ext uri="{FF2B5EF4-FFF2-40B4-BE49-F238E27FC236}">
+                <a16:creationId xmlns:a16="http://schemas.microsoft.com/office/drawing/2014/main" id="{AD7CBE53-759A-48FA-8ED4-A27EEA31C27C}"/>
               </a:ext>
             </a:extLst>
           </p:cNvPr>
@@ -1952,10 +1985,60 @@
       </p:sp>
       <p:sp>
         <p:nvSpPr>
-          <p:cNvPr id="22" name="receptor">
-            <a:extLst xmlns:a="http://schemas.openxmlformats.org/drawingml/2006/main">
-              <a:ext uri="{FF2B5EF4-FFF2-40B4-BE49-F238E27FC236}">
-                <a16:creationId xmlns:a16="http://schemas.microsoft.com/office/drawing/2014/main" id="{92BD6E8F-5927-4518-B343-56B134EEFE62}"/>
+          <p:cNvPr id="23" name="module-order-note">
+            <a:extLst xmlns:a="http://schemas.openxmlformats.org/drawingml/2006/main">
+              <a:ext uri="{FF2B5EF4-FFF2-40B4-BE49-F238E27FC236}">
+                <a16:creationId xmlns:a16="http://schemas.microsoft.com/office/drawing/2014/main" id="{2783E01B-B63C-47C4-BD90-F40D870ABD11}"/>
+              </a:ext>
+            </a:extLst>
+          </p:cNvPr>
+          <p:cNvSpPr>
+            <a:spLocks xmlns:a="http://schemas.openxmlformats.org/drawingml/2006/main" noGrp="1"/>
+          </p:cNvSpPr>
+          <p:nvPr/>
+        </p:nvSpPr>
+        <p:spPr>
+          <a:xfrm xmlns:a="http://schemas.openxmlformats.org/drawingml/2006/main">
+            <a:off x="781050" y="2095500"/>
+            <a:ext cx="3143250" cy="228600"/>
+          </a:xfrm>
+          <a:prstGeom xmlns:a="http://schemas.openxmlformats.org/drawingml/2006/main" prst="rect">
+            <a:avLst/>
+          </a:prstGeom>
+          <a:noFill xmlns:a="http://schemas.openxmlformats.org/drawingml/2006/main"/>
+          <a:ln xmlns:a="http://schemas.openxmlformats.org/drawingml/2006/main" w="0">
+            <a:noFill/>
+            <a:prstDash val="solid"/>
+          </a:ln>
+        </p:spPr>
+        <p:txBody>
+          <a:bodyPr xmlns:a="http://schemas.openxmlformats.org/drawingml/2006/main" anchor="ctr"/>
+          <a:lstStyle xmlns:a="http://schemas.openxmlformats.org/drawingml/2006/main"/>
+          <a:p xmlns:a="http://schemas.openxmlformats.org/drawingml/2006/main">
+            <a:pPr algn="l">
+              <a:defRPr sz="1050" b="0">
+                <a:solidFill>
+                  <a:srgbClr val="526174"/>
+                </a:solidFill>
+              </a:defRPr>
+            </a:pPr>
+            <a:r>
+              <a:rPr sz="1050" b="0">
+                <a:solidFill>
+                  <a:srgbClr val="526174"/>
+                </a:solidFill>
+              </a:rPr>
+              <a:t>Typical modules; order varies among families</a:t>
+            </a:r>
+          </a:p>
+        </p:txBody>
+      </p:sp>
+      <p:sp>
+        <p:nvSpPr>
+          <p:cNvPr id="24" name="receptor">
+            <a:extLst xmlns:a="http://schemas.openxmlformats.org/drawingml/2006/main">
+              <a:ext uri="{FF2B5EF4-FFF2-40B4-BE49-F238E27FC236}">
+                <a16:creationId xmlns:a16="http://schemas.microsoft.com/office/drawing/2014/main" id="{316A2DC0-7694-4475-9C4A-5DE139E2AECD}"/>
               </a:ext>
             </a:extLst>
           </p:cNvPr>
@@ -1987,10 +2070,10 @@
       </p:sp>
       <p:sp>
         <p:nvSpPr>
-          <p:cNvPr id="23" name="receptor-channel">
-            <a:extLst xmlns:a="http://schemas.openxmlformats.org/drawingml/2006/main">
-              <a:ext uri="{FF2B5EF4-FFF2-40B4-BE49-F238E27FC236}">
-                <a16:creationId xmlns:a16="http://schemas.microsoft.com/office/drawing/2014/main" id="{4D192230-BA7B-4B27-AFE8-77E93CE27DDD}"/>
+          <p:cNvPr id="25" name="receptor-channel">
+            <a:extLst xmlns:a="http://schemas.openxmlformats.org/drawingml/2006/main">
+              <a:ext uri="{FF2B5EF4-FFF2-40B4-BE49-F238E27FC236}">
+                <a16:creationId xmlns:a16="http://schemas.microsoft.com/office/drawing/2014/main" id="{AEE180AA-77EA-4BCC-8D4A-C8342AD562FA}"/>
               </a:ext>
             </a:extLst>
           </p:cNvPr>
@@ -2022,22 +2105,22 @@
       </p:sp>
       <p:sp>
         <p:nvSpPr>
-          <p:cNvPr id="24" name="receptor-label">
-            <a:extLst xmlns:a="http://schemas.openxmlformats.org/drawingml/2006/main">
-              <a:ext uri="{FF2B5EF4-FFF2-40B4-BE49-F238E27FC236}">
-                <a16:creationId xmlns:a16="http://schemas.microsoft.com/office/drawing/2014/main" id="{A1FFA12F-99BC-4F10-AC5A-E42E81069B35}"/>
-              </a:ext>
-            </a:extLst>
-          </p:cNvPr>
-          <p:cNvSpPr>
-            <a:spLocks xmlns:a="http://schemas.openxmlformats.org/drawingml/2006/main" noGrp="1"/>
-          </p:cNvSpPr>
-          <p:nvPr/>
-        </p:nvSpPr>
-        <p:spPr>
-          <a:xfrm xmlns:a="http://schemas.openxmlformats.org/drawingml/2006/main">
-            <a:off x="5029200" y="2152650"/>
-            <a:ext cx="1200150" cy="285750"/>
+          <p:cNvPr id="26" name="receptor-label">
+            <a:extLst xmlns:a="http://schemas.openxmlformats.org/drawingml/2006/main">
+              <a:ext uri="{FF2B5EF4-FFF2-40B4-BE49-F238E27FC236}">
+                <a16:creationId xmlns:a16="http://schemas.microsoft.com/office/drawing/2014/main" id="{785227EE-9737-4E38-AE79-378AA15A7583}"/>
+              </a:ext>
+            </a:extLst>
+          </p:cNvPr>
+          <p:cNvSpPr>
+            <a:spLocks xmlns:a="http://schemas.openxmlformats.org/drawingml/2006/main" noGrp="1"/>
+          </p:cNvSpPr>
+          <p:nvPr/>
+        </p:nvSpPr>
+        <p:spPr>
+          <a:xfrm xmlns:a="http://schemas.openxmlformats.org/drawingml/2006/main">
+            <a:off x="4552950" y="2152650"/>
+            <a:ext cx="2152650" cy="285750"/>
           </a:xfrm>
           <a:prstGeom xmlns:a="http://schemas.openxmlformats.org/drawingml/2006/main" prst="rect">
             <a:avLst/>
@@ -2053,29 +2136,29 @@
           <a:lstStyle xmlns:a="http://schemas.openxmlformats.org/drawingml/2006/main"/>
           <a:p xmlns:a="http://schemas.openxmlformats.org/drawingml/2006/main">
             <a:pPr algn="ctr">
-              <a:defRPr sz="1425" b="1">
+              <a:defRPr sz="1350" b="1">
                 <a:solidFill>
                   <a:srgbClr val="1F5B84"/>
                 </a:solidFill>
               </a:defRPr>
             </a:pPr>
             <a:r>
-              <a:rPr sz="1425" b="1">
+              <a:rPr sz="1350" b="1">
                 <a:solidFill>
                   <a:srgbClr val="1F5B84"/>
                 </a:solidFill>
               </a:rPr>
-              <a:t>Receptor</a:t>
+              <a:t>Receptor or surface glycan</a:t>
             </a:r>
           </a:p>
         </p:txBody>
       </p:sp>
       <p:sp>
         <p:nvSpPr>
-          <p:cNvPr id="25" name="unfolded-import">
-            <a:extLst xmlns:a="http://schemas.openxmlformats.org/drawingml/2006/main">
-              <a:ext uri="{FF2B5EF4-FFF2-40B4-BE49-F238E27FC236}">
-                <a16:creationId xmlns:a16="http://schemas.microsoft.com/office/drawing/2014/main" id="{76125D9A-55B0-400C-ADF8-72588CDBF53B}"/>
+          <p:cNvPr id="27" name="unfolded-import">
+            <a:extLst xmlns:a="http://schemas.openxmlformats.org/drawingml/2006/main">
+              <a:ext uri="{FF2B5EF4-FFF2-40B4-BE49-F238E27FC236}">
+                <a16:creationId xmlns:a16="http://schemas.microsoft.com/office/drawing/2014/main" id="{47A10802-AE6D-45F7-AA80-C6401EDAD50C}"/>
               </a:ext>
             </a:extLst>
           </p:cNvPr>
@@ -2107,10 +2190,10 @@
       </p:sp>
       <p:sp>
         <p:nvSpPr>
-          <p:cNvPr id="26" name="translocation-label">
-            <a:extLst xmlns:a="http://schemas.openxmlformats.org/drawingml/2006/main">
-              <a:ext uri="{FF2B5EF4-FFF2-40B4-BE49-F238E27FC236}">
-                <a16:creationId xmlns:a16="http://schemas.microsoft.com/office/drawing/2014/main" id="{46D9E67D-CF0E-4623-B827-9F8CE1BBC588}"/>
+          <p:cNvPr id="28" name="translocation-label">
+            <a:extLst xmlns:a="http://schemas.openxmlformats.org/drawingml/2006/main">
+              <a:ext uri="{FF2B5EF4-FFF2-40B4-BE49-F238E27FC236}">
+                <a16:creationId xmlns:a16="http://schemas.microsoft.com/office/drawing/2014/main" id="{5AB38D91-E2B3-46DA-B327-1965BC37D029}"/>
               </a:ext>
             </a:extLst>
           </p:cNvPr>
@@ -2157,10 +2240,10 @@
       </p:sp>
       <p:sp>
         <p:nvSpPr>
-          <p:cNvPr id="27" name="energy">
-            <a:extLst xmlns:a="http://schemas.openxmlformats.org/drawingml/2006/main">
-              <a:ext uri="{FF2B5EF4-FFF2-40B4-BE49-F238E27FC236}">
-                <a16:creationId xmlns:a16="http://schemas.microsoft.com/office/drawing/2014/main" id="{A80443BA-556A-4541-9421-3FBC373C3124}"/>
+          <p:cNvPr id="29" name="energy">
+            <a:extLst xmlns:a="http://schemas.openxmlformats.org/drawingml/2006/main">
+              <a:ext uri="{FF2B5EF4-FFF2-40B4-BE49-F238E27FC236}">
+                <a16:creationId xmlns:a16="http://schemas.microsoft.com/office/drawing/2014/main" id="{BAEF3482-8EAE-45BE-9B7C-FE00EBDD8A47}"/>
               </a:ext>
             </a:extLst>
           </p:cNvPr>
@@ -2190,10 +2273,10 @@
       </p:sp>
       <p:sp>
         <p:nvSpPr>
-          <p:cNvPr id="28" name="ton-tol">
-            <a:extLst xmlns:a="http://schemas.openxmlformats.org/drawingml/2006/main">
-              <a:ext uri="{FF2B5EF4-FFF2-40B4-BE49-F238E27FC236}">
-                <a16:creationId xmlns:a16="http://schemas.microsoft.com/office/drawing/2014/main" id="{BBF50C6B-6845-4287-A63E-BC5D86CB7369}"/>
+          <p:cNvPr id="30" name="ton-tol">
+            <a:extLst xmlns:a="http://schemas.openxmlformats.org/drawingml/2006/main">
+              <a:ext uri="{FF2B5EF4-FFF2-40B4-BE49-F238E27FC236}">
+                <a16:creationId xmlns:a16="http://schemas.microsoft.com/office/drawing/2014/main" id="{438969F1-C782-471C-85C8-B428CFAC7C9C}"/>
               </a:ext>
             </a:extLst>
           </p:cNvPr>
@@ -2225,10 +2308,10 @@
       </p:sp>
       <p:sp>
         <p:nvSpPr>
-          <p:cNvPr id="29" name="ton-tol-label">
-            <a:extLst xmlns:a="http://schemas.openxmlformats.org/drawingml/2006/main">
-              <a:ext uri="{FF2B5EF4-FFF2-40B4-BE49-F238E27FC236}">
-                <a16:creationId xmlns:a16="http://schemas.microsoft.com/office/drawing/2014/main" id="{8CF13245-B5AE-4720-9A70-E069140FDFD4}"/>
+          <p:cNvPr id="31" name="ton-tol-label">
+            <a:extLst xmlns:a="http://schemas.openxmlformats.org/drawingml/2006/main">
+              <a:ext uri="{FF2B5EF4-FFF2-40B4-BE49-F238E27FC236}">
+                <a16:creationId xmlns:a16="http://schemas.microsoft.com/office/drawing/2014/main" id="{67FA7C44-B265-4611-8927-70DD302381F8}"/>
               </a:ext>
             </a:extLst>
           </p:cNvPr>
@@ -2256,29 +2339,29 @@
           <a:lstStyle xmlns:a="http://schemas.openxmlformats.org/drawingml/2006/main"/>
           <a:p xmlns:a="http://schemas.openxmlformats.org/drawingml/2006/main">
             <a:pPr algn="ctr">
-              <a:defRPr sz="1275" b="1">
+              <a:defRPr sz="1200" b="1">
                 <a:solidFill>
                   <a:srgbClr val="5A4291"/>
                 </a:solidFill>
               </a:defRPr>
             </a:pPr>
             <a:r>
-              <a:rPr sz="1275" b="1">
+              <a:rPr sz="1200" b="1">
                 <a:solidFill>
                   <a:srgbClr val="5A4291"/>
                 </a:solidFill>
               </a:rPr>
-              <a:t>TonB or TolA</a:t>
+              <a:t>Ton or Tol system</a:t>
             </a:r>
           </a:p>
         </p:txBody>
       </p:sp>
       <p:sp>
         <p:nvSpPr>
-          <p:cNvPr id="30" name="energy-label">
-            <a:extLst xmlns:a="http://schemas.openxmlformats.org/drawingml/2006/main">
-              <a:ext uri="{FF2B5EF4-FFF2-40B4-BE49-F238E27FC236}">
-                <a16:creationId xmlns:a16="http://schemas.microsoft.com/office/drawing/2014/main" id="{4A03A5A9-D7F8-456A-B343-B002F2A9E8EF}"/>
+          <p:cNvPr id="32" name="energy-label">
+            <a:extLst xmlns:a="http://schemas.openxmlformats.org/drawingml/2006/main">
+              <a:ext uri="{FF2B5EF4-FFF2-40B4-BE49-F238E27FC236}">
+                <a16:creationId xmlns:a16="http://schemas.microsoft.com/office/drawing/2014/main" id="{9BF0F1C6-0107-4BB1-8662-C874351E2A97}"/>
               </a:ext>
             </a:extLst>
           </p:cNvPr>
@@ -2342,55 +2425,22 @@
       </p:sp>
       <p:sp>
         <p:nvSpPr>
-          <p:cNvPr id="31" name="delivered-domain">
-            <a:extLst xmlns:a="http://schemas.openxmlformats.org/drawingml/2006/main">
-              <a:ext uri="{FF2B5EF4-FFF2-40B4-BE49-F238E27FC236}">
-                <a16:creationId xmlns:a16="http://schemas.microsoft.com/office/drawing/2014/main" id="{ED938D50-6EE3-427C-902E-96A3192861A2}"/>
-              </a:ext>
-            </a:extLst>
-          </p:cNvPr>
-          <p:cNvSpPr>
-            <a:spLocks xmlns:a="http://schemas.openxmlformats.org/drawingml/2006/main" noGrp="1"/>
-          </p:cNvSpPr>
-          <p:nvPr/>
-        </p:nvSpPr>
-        <p:spPr>
-          <a:xfrm xmlns:a="http://schemas.openxmlformats.org/drawingml/2006/main">
-            <a:off x="7086600" y="5391150"/>
-            <a:ext cx="647700" cy="552450"/>
-          </a:xfrm>
-          <a:prstGeom xmlns:a="http://schemas.openxmlformats.org/drawingml/2006/main" prst="ellipse">
-            <a:avLst/>
-          </a:prstGeom>
-          <a:solidFill xmlns:a="http://schemas.openxmlformats.org/drawingml/2006/main">
-            <a:srgbClr val="EE9B3B"/>
-          </a:solidFill>
-          <a:ln xmlns:a="http://schemas.openxmlformats.org/drawingml/2006/main" w="14288">
-            <a:solidFill>
-              <a:srgbClr val="B66B13"/>
-            </a:solidFill>
-            <a:prstDash val="solid"/>
-          </a:ln>
-        </p:spPr>
-      </p:sp>
-      <p:sp>
-        <p:nvSpPr>
-          <p:cNvPr id="32" name="delivered-domain-label">
-            <a:extLst xmlns:a="http://schemas.openxmlformats.org/drawingml/2006/main">
-              <a:ext uri="{FF2B5EF4-FFF2-40B4-BE49-F238E27FC236}">
-                <a16:creationId xmlns:a16="http://schemas.microsoft.com/office/drawing/2014/main" id="{4BB19CF1-0D3B-4D2B-81B3-50438D37001B}"/>
-              </a:ext>
-            </a:extLst>
-          </p:cNvPr>
-          <p:cNvSpPr>
-            <a:spLocks xmlns:a="http://schemas.openxmlformats.org/drawingml/2006/main" noGrp="1"/>
-          </p:cNvSpPr>
-          <p:nvPr/>
-        </p:nvSpPr>
-        <p:spPr>
-          <a:xfrm xmlns:a="http://schemas.openxmlformats.org/drawingml/2006/main">
-            <a:off x="7086600" y="5448300"/>
-            <a:ext cx="647700" cy="419100"/>
+          <p:cNvPr id="33" name="effects-label">
+            <a:extLst xmlns:a="http://schemas.openxmlformats.org/drawingml/2006/main">
+              <a:ext uri="{FF2B5EF4-FFF2-40B4-BE49-F238E27FC236}">
+                <a16:creationId xmlns:a16="http://schemas.microsoft.com/office/drawing/2014/main" id="{BA40D9FA-5AA6-4054-AF58-E5751A70C1D1}"/>
+              </a:ext>
+            </a:extLst>
+          </p:cNvPr>
+          <p:cNvSpPr>
+            <a:spLocks xmlns:a="http://schemas.openxmlformats.org/drawingml/2006/main" noGrp="1"/>
+          </p:cNvSpPr>
+          <p:nvPr/>
+        </p:nvSpPr>
+        <p:spPr>
+          <a:xfrm xmlns:a="http://schemas.openxmlformats.org/drawingml/2006/main">
+            <a:off x="6953250" y="3333750"/>
+            <a:ext cx="4324350" cy="285750"/>
           </a:xfrm>
           <a:prstGeom xmlns:a="http://schemas.openxmlformats.org/drawingml/2006/main" prst="rect">
             <a:avLst/>
@@ -2406,14 +2456,97 @@
           <a:lstStyle xmlns:a="http://schemas.openxmlformats.org/drawingml/2006/main"/>
           <a:p xmlns:a="http://schemas.openxmlformats.org/drawingml/2006/main">
             <a:pPr algn="ctr">
-              <a:defRPr sz="1050" b="1">
-                <a:solidFill>
-                  <a:srgbClr val="FFFFFF"/>
+              <a:defRPr sz="1350" b="1">
+                <a:solidFill>
+                  <a:srgbClr val="526174"/>
                 </a:solidFill>
               </a:defRPr>
             </a:pPr>
             <a:r>
-              <a:rPr sz="1050" b="1">
+              <a:rPr sz="1350" b="1">
+                <a:solidFill>
+                  <a:srgbClr val="526174"/>
+                </a:solidFill>
+              </a:rPr>
+              <a:t>Possible family-specific killing sites</a:t>
+            </a:r>
+          </a:p>
+        </p:txBody>
+      </p:sp>
+      <p:sp>
+        <p:nvSpPr>
+          <p:cNvPr id="34" name="periplasm-domain">
+            <a:extLst xmlns:a="http://schemas.openxmlformats.org/drawingml/2006/main">
+              <a:ext uri="{FF2B5EF4-FFF2-40B4-BE49-F238E27FC236}">
+                <a16:creationId xmlns:a16="http://schemas.microsoft.com/office/drawing/2014/main" id="{F158E798-2129-4613-BB92-C72B4B2C466E}"/>
+              </a:ext>
+            </a:extLst>
+          </p:cNvPr>
+          <p:cNvSpPr>
+            <a:spLocks xmlns:a="http://schemas.openxmlformats.org/drawingml/2006/main" noGrp="1"/>
+          </p:cNvSpPr>
+          <p:nvPr/>
+        </p:nvSpPr>
+        <p:spPr>
+          <a:xfrm xmlns:a="http://schemas.openxmlformats.org/drawingml/2006/main">
+            <a:off x="6210300" y="3733800"/>
+            <a:ext cx="628650" cy="514350"/>
+          </a:xfrm>
+          <a:prstGeom xmlns:a="http://schemas.openxmlformats.org/drawingml/2006/main" prst="ellipse">
+            <a:avLst/>
+          </a:prstGeom>
+          <a:solidFill xmlns:a="http://schemas.openxmlformats.org/drawingml/2006/main">
+            <a:srgbClr val="EE9B3B"/>
+          </a:solidFill>
+          <a:ln xmlns:a="http://schemas.openxmlformats.org/drawingml/2006/main" w="14288">
+            <a:solidFill>
+              <a:srgbClr val="B66B13"/>
+            </a:solidFill>
+            <a:prstDash val="solid"/>
+          </a:ln>
+        </p:spPr>
+      </p:sp>
+      <p:sp>
+        <p:nvSpPr>
+          <p:cNvPr id="35" name="periplasm-domain-label">
+            <a:extLst xmlns:a="http://schemas.openxmlformats.org/drawingml/2006/main">
+              <a:ext uri="{FF2B5EF4-FFF2-40B4-BE49-F238E27FC236}">
+                <a16:creationId xmlns:a16="http://schemas.microsoft.com/office/drawing/2014/main" id="{7576EAFC-DE41-42B9-8212-CCC874FAD8C6}"/>
+              </a:ext>
+            </a:extLst>
+          </p:cNvPr>
+          <p:cNvSpPr>
+            <a:spLocks xmlns:a="http://schemas.openxmlformats.org/drawingml/2006/main" noGrp="1"/>
+          </p:cNvSpPr>
+          <p:nvPr/>
+        </p:nvSpPr>
+        <p:spPr>
+          <a:xfrm xmlns:a="http://schemas.openxmlformats.org/drawingml/2006/main">
+            <a:off x="6210300" y="3790950"/>
+            <a:ext cx="628650" cy="400050"/>
+          </a:xfrm>
+          <a:prstGeom xmlns:a="http://schemas.openxmlformats.org/drawingml/2006/main" prst="rect">
+            <a:avLst/>
+          </a:prstGeom>
+          <a:noFill xmlns:a="http://schemas.openxmlformats.org/drawingml/2006/main"/>
+          <a:ln xmlns:a="http://schemas.openxmlformats.org/drawingml/2006/main" w="0">
+            <a:noFill/>
+            <a:prstDash val="solid"/>
+          </a:ln>
+        </p:spPr>
+        <p:txBody>
+          <a:bodyPr xmlns:a="http://schemas.openxmlformats.org/drawingml/2006/main" anchor="ctr"/>
+          <a:lstStyle xmlns:a="http://schemas.openxmlformats.org/drawingml/2006/main"/>
+          <a:p xmlns:a="http://schemas.openxmlformats.org/drawingml/2006/main">
+            <a:pPr algn="ctr">
+              <a:defRPr sz="975" b="1">
+                <a:solidFill>
+                  <a:srgbClr val="FFFFFF"/>
+                </a:solidFill>
+              </a:defRPr>
+            </a:pPr>
+            <a:r>
+              <a:rPr sz="975" b="1">
                 <a:solidFill>
                   <a:srgbClr val="FFFFFF"/>
                 </a:solidFill>
@@ -2423,14 +2556,14 @@
           </a:p>
           <a:p xmlns:a="http://schemas.openxmlformats.org/drawingml/2006/main">
             <a:pPr algn="ctr">
-              <a:defRPr sz="1050" b="1">
+              <a:defRPr sz="975" b="1">
                 <a:solidFill>
                   <a:srgbClr val="FFFFFF"/>
                 </a:solidFill>
               </a:defRPr>
             </a:pPr>
             <a:r>
-              <a:rPr sz="1050" b="1">
+              <a:rPr sz="975" b="1">
                 <a:solidFill>
                   <a:srgbClr val="FFFFFF"/>
                 </a:solidFill>
@@ -2442,22 +2575,237 @@
       </p:sp>
       <p:sp>
         <p:nvSpPr>
-          <p:cNvPr id="33" name="effects-label">
-            <a:extLst xmlns:a="http://schemas.openxmlformats.org/drawingml/2006/main">
-              <a:ext uri="{FF2B5EF4-FFF2-40B4-BE49-F238E27FC236}">
-                <a16:creationId xmlns:a16="http://schemas.microsoft.com/office/drawing/2014/main" id="{C8B72074-D679-4C90-8A16-6706A62CC544}"/>
-              </a:ext>
-            </a:extLst>
-          </p:cNvPr>
-          <p:cNvSpPr>
-            <a:spLocks xmlns:a="http://schemas.openxmlformats.org/drawingml/2006/main" noGrp="1"/>
-          </p:cNvSpPr>
-          <p:nvPr/>
-        </p:nvSpPr>
-        <p:spPr>
-          <a:xfrm xmlns:a="http://schemas.openxmlformats.org/drawingml/2006/main">
-            <a:off x="8477250" y="5048250"/>
-            <a:ext cx="2857500" cy="285750"/>
+          <p:cNvPr id="36" name="brick-one">
+            <a:extLst xmlns:a="http://schemas.openxmlformats.org/drawingml/2006/main">
+              <a:ext uri="{FF2B5EF4-FFF2-40B4-BE49-F238E27FC236}">
+                <a16:creationId xmlns:a16="http://schemas.microsoft.com/office/drawing/2014/main" id="{3868B819-60C1-4EA2-997F-9B798299535C}"/>
+              </a:ext>
+            </a:extLst>
+          </p:cNvPr>
+          <p:cNvSpPr>
+            <a:spLocks xmlns:a="http://schemas.openxmlformats.org/drawingml/2006/main" noGrp="1"/>
+          </p:cNvSpPr>
+          <p:nvPr/>
+        </p:nvSpPr>
+        <p:spPr>
+          <a:xfrm xmlns:a="http://schemas.openxmlformats.org/drawingml/2006/main">
+            <a:off x="9220200" y="3733800"/>
+            <a:ext cx="400050" cy="171450"/>
+          </a:xfrm>
+          <a:prstGeom xmlns:a="http://schemas.openxmlformats.org/drawingml/2006/main" prst="rect">
+            <a:avLst/>
+          </a:prstGeom>
+          <a:solidFill xmlns:a="http://schemas.openxmlformats.org/drawingml/2006/main">
+            <a:srgbClr val="D6A86C"/>
+          </a:solidFill>
+          <a:ln xmlns:a="http://schemas.openxmlformats.org/drawingml/2006/main" w="9525">
+            <a:solidFill>
+              <a:srgbClr val="8E622D"/>
+            </a:solidFill>
+            <a:prstDash val="solid"/>
+          </a:ln>
+        </p:spPr>
+      </p:sp>
+      <p:sp>
+        <p:nvSpPr>
+          <p:cNvPr id="37" name="brick-two">
+            <a:extLst xmlns:a="http://schemas.openxmlformats.org/drawingml/2006/main">
+              <a:ext uri="{FF2B5EF4-FFF2-40B4-BE49-F238E27FC236}">
+                <a16:creationId xmlns:a16="http://schemas.microsoft.com/office/drawing/2014/main" id="{0A12A3A6-E5B0-4389-887C-D8EF5D7780AB}"/>
+              </a:ext>
+            </a:extLst>
+          </p:cNvPr>
+          <p:cNvSpPr>
+            <a:spLocks xmlns:a="http://schemas.openxmlformats.org/drawingml/2006/main" noGrp="1"/>
+          </p:cNvSpPr>
+          <p:nvPr/>
+        </p:nvSpPr>
+        <p:spPr>
+          <a:xfrm xmlns:a="http://schemas.openxmlformats.org/drawingml/2006/main">
+            <a:off x="9639300" y="3733800"/>
+            <a:ext cx="400050" cy="171450"/>
+          </a:xfrm>
+          <a:prstGeom xmlns:a="http://schemas.openxmlformats.org/drawingml/2006/main" prst="rect">
+            <a:avLst/>
+          </a:prstGeom>
+          <a:solidFill xmlns:a="http://schemas.openxmlformats.org/drawingml/2006/main">
+            <a:srgbClr val="D6A86C"/>
+          </a:solidFill>
+          <a:ln xmlns:a="http://schemas.openxmlformats.org/drawingml/2006/main" w="9525">
+            <a:solidFill>
+              <a:srgbClr val="8E622D"/>
+            </a:solidFill>
+            <a:prstDash val="solid"/>
+          </a:ln>
+        </p:spPr>
+      </p:sp>
+      <p:sp>
+        <p:nvSpPr>
+          <p:cNvPr id="38" name="brick-three">
+            <a:extLst xmlns:a="http://schemas.openxmlformats.org/drawingml/2006/main">
+              <a:ext uri="{FF2B5EF4-FFF2-40B4-BE49-F238E27FC236}">
+                <a16:creationId xmlns:a16="http://schemas.microsoft.com/office/drawing/2014/main" id="{7C6DDD01-311F-45DE-87AA-E95E45A3DB3D}"/>
+              </a:ext>
+            </a:extLst>
+          </p:cNvPr>
+          <p:cNvSpPr>
+            <a:spLocks xmlns:a="http://schemas.openxmlformats.org/drawingml/2006/main" noGrp="1"/>
+          </p:cNvSpPr>
+          <p:nvPr/>
+        </p:nvSpPr>
+        <p:spPr>
+          <a:xfrm xmlns:a="http://schemas.openxmlformats.org/drawingml/2006/main">
+            <a:off x="9010650" y="3933825"/>
+            <a:ext cx="400050" cy="171450"/>
+          </a:xfrm>
+          <a:prstGeom xmlns:a="http://schemas.openxmlformats.org/drawingml/2006/main" prst="rect">
+            <a:avLst/>
+          </a:prstGeom>
+          <a:solidFill xmlns:a="http://schemas.openxmlformats.org/drawingml/2006/main">
+            <a:srgbClr val="D6A86C"/>
+          </a:solidFill>
+          <a:ln xmlns:a="http://schemas.openxmlformats.org/drawingml/2006/main" w="9525">
+            <a:solidFill>
+              <a:srgbClr val="8E622D"/>
+            </a:solidFill>
+            <a:prstDash val="solid"/>
+          </a:ln>
+        </p:spPr>
+      </p:sp>
+      <p:sp>
+        <p:nvSpPr>
+          <p:cNvPr id="39" name="missing-brick">
+            <a:extLst xmlns:a="http://schemas.openxmlformats.org/drawingml/2006/main">
+              <a:ext uri="{FF2B5EF4-FFF2-40B4-BE49-F238E27FC236}">
+                <a16:creationId xmlns:a16="http://schemas.microsoft.com/office/drawing/2014/main" id="{F2DDA922-5333-400C-8326-2C126400C3CB}"/>
+              </a:ext>
+            </a:extLst>
+          </p:cNvPr>
+          <p:cNvSpPr>
+            <a:spLocks xmlns:a="http://schemas.openxmlformats.org/drawingml/2006/main" noGrp="1"/>
+          </p:cNvSpPr>
+          <p:nvPr/>
+        </p:nvSpPr>
+        <p:spPr>
+          <a:xfrm xmlns:a="http://schemas.openxmlformats.org/drawingml/2006/main">
+            <a:off x="9429750" y="3933825"/>
+            <a:ext cx="400050" cy="171450"/>
+          </a:xfrm>
+          <a:prstGeom xmlns:a="http://schemas.openxmlformats.org/drawingml/2006/main" prst="rect">
+            <a:avLst/>
+          </a:prstGeom>
+          <a:solidFill xmlns:a="http://schemas.openxmlformats.org/drawingml/2006/main">
+            <a:srgbClr val="FFFFFF"/>
+          </a:solidFill>
+          <a:ln xmlns:a="http://schemas.openxmlformats.org/drawingml/2006/main" w="19050">
+            <a:solidFill>
+              <a:srgbClr val="D94B4B"/>
+            </a:solidFill>
+            <a:prstDash val="solid"/>
+          </a:ln>
+        </p:spPr>
+      </p:sp>
+      <p:sp>
+        <p:nvSpPr>
+          <p:cNvPr id="40" name="wall-label">
+            <a:extLst xmlns:a="http://schemas.openxmlformats.org/drawingml/2006/main">
+              <a:ext uri="{FF2B5EF4-FFF2-40B4-BE49-F238E27FC236}">
+                <a16:creationId xmlns:a16="http://schemas.microsoft.com/office/drawing/2014/main" id="{6DC7EF13-AFE7-43CD-98B2-FC86E5714D08}"/>
+              </a:ext>
+            </a:extLst>
+          </p:cNvPr>
+          <p:cNvSpPr>
+            <a:spLocks xmlns:a="http://schemas.openxmlformats.org/drawingml/2006/main" noGrp="1"/>
+          </p:cNvSpPr>
+          <p:nvPr/>
+        </p:nvSpPr>
+        <p:spPr>
+          <a:xfrm xmlns:a="http://schemas.openxmlformats.org/drawingml/2006/main">
+            <a:off x="10134600" y="3733800"/>
+            <a:ext cx="1676400" cy="400050"/>
+          </a:xfrm>
+          <a:prstGeom xmlns:a="http://schemas.openxmlformats.org/drawingml/2006/main" prst="rect">
+            <a:avLst/>
+          </a:prstGeom>
+          <a:noFill xmlns:a="http://schemas.openxmlformats.org/drawingml/2006/main"/>
+          <a:ln xmlns:a="http://schemas.openxmlformats.org/drawingml/2006/main" w="0">
+            <a:noFill/>
+            <a:prstDash val="solid"/>
+          </a:ln>
+        </p:spPr>
+        <p:txBody>
+          <a:bodyPr xmlns:a="http://schemas.openxmlformats.org/drawingml/2006/main" anchor="ctr"/>
+          <a:lstStyle xmlns:a="http://schemas.openxmlformats.org/drawingml/2006/main"/>
+          <a:p xmlns:a="http://schemas.openxmlformats.org/drawingml/2006/main">
+            <a:pPr algn="l">
+              <a:defRPr sz="1200" b="1">
+                <a:solidFill>
+                  <a:srgbClr val="172033"/>
+                </a:solidFill>
+              </a:defRPr>
+            </a:pPr>
+            <a:r>
+              <a:rPr sz="1200" b="1">
+                <a:solidFill>
+                  <a:srgbClr val="172033"/>
+                </a:solidFill>
+              </a:rPr>
+              <a:t>Peptidoglycan damage</a:t>
+            </a:r>
+          </a:p>
+        </p:txBody>
+      </p:sp>
+      <p:sp>
+        <p:nvSpPr>
+          <p:cNvPr id="41" name="pore-domain">
+            <a:extLst xmlns:a="http://schemas.openxmlformats.org/drawingml/2006/main">
+              <a:ext uri="{FF2B5EF4-FFF2-40B4-BE49-F238E27FC236}">
+                <a16:creationId xmlns:a16="http://schemas.microsoft.com/office/drawing/2014/main" id="{8CCF2BBC-402A-443B-B6C1-D6AE53734FA0}"/>
+              </a:ext>
+            </a:extLst>
+          </p:cNvPr>
+          <p:cNvSpPr>
+            <a:spLocks xmlns:a="http://schemas.openxmlformats.org/drawingml/2006/main" noGrp="1"/>
+          </p:cNvSpPr>
+          <p:nvPr/>
+        </p:nvSpPr>
+        <p:spPr>
+          <a:xfrm xmlns:a="http://schemas.openxmlformats.org/drawingml/2006/main">
+            <a:off x="6210300" y="4524375"/>
+            <a:ext cx="628650" cy="514350"/>
+          </a:xfrm>
+          <a:prstGeom xmlns:a="http://schemas.openxmlformats.org/drawingml/2006/main" prst="ellipse">
+            <a:avLst/>
+          </a:prstGeom>
+          <a:solidFill xmlns:a="http://schemas.openxmlformats.org/drawingml/2006/main">
+            <a:srgbClr val="EE9B3B"/>
+          </a:solidFill>
+          <a:ln xmlns:a="http://schemas.openxmlformats.org/drawingml/2006/main" w="14288">
+            <a:solidFill>
+              <a:srgbClr val="B66B13"/>
+            </a:solidFill>
+            <a:prstDash val="solid"/>
+          </a:ln>
+        </p:spPr>
+      </p:sp>
+      <p:sp>
+        <p:nvSpPr>
+          <p:cNvPr id="42" name="pore-domain-label">
+            <a:extLst xmlns:a="http://schemas.openxmlformats.org/drawingml/2006/main">
+              <a:ext uri="{FF2B5EF4-FFF2-40B4-BE49-F238E27FC236}">
+                <a16:creationId xmlns:a16="http://schemas.microsoft.com/office/drawing/2014/main" id="{6033C066-C151-441B-B672-01DCF06E8410}"/>
+              </a:ext>
+            </a:extLst>
+          </p:cNvPr>
+          <p:cNvSpPr>
+            <a:spLocks xmlns:a="http://schemas.openxmlformats.org/drawingml/2006/main" noGrp="1"/>
+          </p:cNvSpPr>
+          <p:nvPr/>
+        </p:nvSpPr>
+        <p:spPr>
+          <a:xfrm xmlns:a="http://schemas.openxmlformats.org/drawingml/2006/main">
+            <a:off x="6210300" y="4581525"/>
+            <a:ext cx="628650" cy="400050"/>
           </a:xfrm>
           <a:prstGeom xmlns:a="http://schemas.openxmlformats.org/drawingml/2006/main" prst="rect">
             <a:avLst/>
@@ -2473,41 +2821,58 @@
           <a:lstStyle xmlns:a="http://schemas.openxmlformats.org/drawingml/2006/main"/>
           <a:p xmlns:a="http://schemas.openxmlformats.org/drawingml/2006/main">
             <a:pPr algn="ctr">
-              <a:defRPr sz="1350" b="1">
-                <a:solidFill>
-                  <a:srgbClr val="526174"/>
+              <a:defRPr sz="975" b="1">
+                <a:solidFill>
+                  <a:srgbClr val="FFFFFF"/>
                 </a:solidFill>
               </a:defRPr>
             </a:pPr>
             <a:r>
-              <a:rPr sz="1350" b="1">
-                <a:solidFill>
-                  <a:srgbClr val="526174"/>
+              <a:rPr sz="975" b="1">
+                <a:solidFill>
+                  <a:srgbClr val="FFFFFF"/>
                 </a:solidFill>
               </a:rPr>
-              <a:t>Possible toxic effects</a:t>
+              <a:t>Killing</a:t>
+            </a:r>
+          </a:p>
+          <a:p xmlns:a="http://schemas.openxmlformats.org/drawingml/2006/main">
+            <a:pPr algn="ctr">
+              <a:defRPr sz="975" b="1">
+                <a:solidFill>
+                  <a:srgbClr val="FFFFFF"/>
+                </a:solidFill>
+              </a:defRPr>
+            </a:pPr>
+            <a:r>
+              <a:rPr sz="975" b="1">
+                <a:solidFill>
+                  <a:srgbClr val="FFFFFF"/>
+                </a:solidFill>
+              </a:rPr>
+              <a:t>domain</a:t>
             </a:r>
           </a:p>
         </p:txBody>
       </p:sp>
       <p:sp>
         <p:nvSpPr>
-          <p:cNvPr id="34" name="pore-membrane-left">
-            <a:extLst xmlns:a="http://schemas.openxmlformats.org/drawingml/2006/main">
-              <a:ext uri="{FF2B5EF4-FFF2-40B4-BE49-F238E27FC236}">
-                <a16:creationId xmlns:a16="http://schemas.microsoft.com/office/drawing/2014/main" id="{966BCC08-9615-40AF-8598-D8CE73B2E1ED}"/>
-              </a:ext>
-            </a:extLst>
-          </p:cNvPr>
-          <p:cNvSpPr>
-            <a:spLocks xmlns:a="http://schemas.openxmlformats.org/drawingml/2006/main" noGrp="1"/>
-          </p:cNvSpPr>
-          <p:nvPr/>
-        </p:nvSpPr>
-        <p:spPr>
-          <a:xfrm xmlns:a="http://schemas.openxmlformats.org/drawingml/2006/main">
-            <a:off x="8572500" y="5543550"/>
-            <a:ext cx="419100" cy="114300"/>
+          <p:cNvPr id="43" name="pore-membrane-left">
+            <a:extLst xmlns:a="http://schemas.openxmlformats.org/drawingml/2006/main">
+              <a:ext uri="{FF2B5EF4-FFF2-40B4-BE49-F238E27FC236}">
+                <a16:creationId xmlns:a16="http://schemas.microsoft.com/office/drawing/2014/main" id="{A42E137E-DF38-4693-B950-C2AEB2210D90}"/>
+              </a:ext>
+            </a:extLst>
+          </p:cNvPr>
+          <p:cNvSpPr>
+            <a:spLocks xmlns:a="http://schemas.openxmlformats.org/drawingml/2006/main" noGrp="1"/>
+          </p:cNvSpPr>
+          <p:nvPr/>
+        </p:nvSpPr>
+        <p:spPr>
+          <a:xfrm xmlns:a="http://schemas.openxmlformats.org/drawingml/2006/main">
+            <a:off x="8629650" y="4657725"/>
+            <a:ext cx="438150" cy="114300"/>
           </a:xfrm>
           <a:prstGeom xmlns:a="http://schemas.openxmlformats.org/drawingml/2006/main" prst="rect">
             <a:avLst/>
@@ -2525,22 +2890,22 @@
       </p:sp>
       <p:sp>
         <p:nvSpPr>
-          <p:cNvPr id="35" name="pore-membrane-right">
-            <a:extLst xmlns:a="http://schemas.openxmlformats.org/drawingml/2006/main">
-              <a:ext uri="{FF2B5EF4-FFF2-40B4-BE49-F238E27FC236}">
-                <a16:creationId xmlns:a16="http://schemas.microsoft.com/office/drawing/2014/main" id="{8BD0AB99-F045-47BE-8185-C4C387B0E892}"/>
-              </a:ext>
-            </a:extLst>
-          </p:cNvPr>
-          <p:cNvSpPr>
-            <a:spLocks xmlns:a="http://schemas.openxmlformats.org/drawingml/2006/main" noGrp="1"/>
-          </p:cNvSpPr>
-          <p:nvPr/>
-        </p:nvSpPr>
-        <p:spPr>
-          <a:xfrm xmlns:a="http://schemas.openxmlformats.org/drawingml/2006/main">
-            <a:off x="9220200" y="5543550"/>
-            <a:ext cx="419100" cy="114300"/>
+          <p:cNvPr id="44" name="pore-membrane-right">
+            <a:extLst xmlns:a="http://schemas.openxmlformats.org/drawingml/2006/main">
+              <a:ext uri="{FF2B5EF4-FFF2-40B4-BE49-F238E27FC236}">
+                <a16:creationId xmlns:a16="http://schemas.microsoft.com/office/drawing/2014/main" id="{794C3517-7B66-4922-AE26-1443CAFB4FEA}"/>
+              </a:ext>
+            </a:extLst>
+          </p:cNvPr>
+          <p:cNvSpPr>
+            <a:spLocks xmlns:a="http://schemas.openxmlformats.org/drawingml/2006/main" noGrp="1"/>
+          </p:cNvSpPr>
+          <p:nvPr/>
+        </p:nvSpPr>
+        <p:spPr>
+          <a:xfrm xmlns:a="http://schemas.openxmlformats.org/drawingml/2006/main">
+            <a:off x="9334500" y="4657725"/>
+            <a:ext cx="438150" cy="114300"/>
           </a:xfrm>
           <a:prstGeom xmlns:a="http://schemas.openxmlformats.org/drawingml/2006/main" prst="rect">
             <a:avLst/>
@@ -2558,22 +2923,22 @@
       </p:sp>
       <p:sp>
         <p:nvSpPr>
-          <p:cNvPr id="36" name="pore">
-            <a:extLst xmlns:a="http://schemas.openxmlformats.org/drawingml/2006/main">
-              <a:ext uri="{FF2B5EF4-FFF2-40B4-BE49-F238E27FC236}">
-                <a16:creationId xmlns:a16="http://schemas.microsoft.com/office/drawing/2014/main" id="{5409AF13-CE74-4D6F-A446-B311731F92DF}"/>
-              </a:ext>
-            </a:extLst>
-          </p:cNvPr>
-          <p:cNvSpPr>
-            <a:spLocks xmlns:a="http://schemas.openxmlformats.org/drawingml/2006/main" noGrp="1"/>
-          </p:cNvSpPr>
-          <p:nvPr/>
-        </p:nvSpPr>
-        <p:spPr>
-          <a:xfrm xmlns:a="http://schemas.openxmlformats.org/drawingml/2006/main">
-            <a:off x="8972550" y="5391150"/>
-            <a:ext cx="266700" cy="457200"/>
+          <p:cNvPr id="45" name="pore">
+            <a:extLst xmlns:a="http://schemas.openxmlformats.org/drawingml/2006/main">
+              <a:ext uri="{FF2B5EF4-FFF2-40B4-BE49-F238E27FC236}">
+                <a16:creationId xmlns:a16="http://schemas.microsoft.com/office/drawing/2014/main" id="{600CB386-0059-4CBD-9616-B834AB2E919E}"/>
+              </a:ext>
+            </a:extLst>
+          </p:cNvPr>
+          <p:cNvSpPr>
+            <a:spLocks xmlns:a="http://schemas.openxmlformats.org/drawingml/2006/main" noGrp="1"/>
+          </p:cNvSpPr>
+          <p:nvPr/>
+        </p:nvSpPr>
+        <p:spPr>
+          <a:xfrm xmlns:a="http://schemas.openxmlformats.org/drawingml/2006/main">
+            <a:off x="9067800" y="4495800"/>
+            <a:ext cx="266700" cy="533400"/>
           </a:xfrm>
           <a:prstGeom xmlns:a="http://schemas.openxmlformats.org/drawingml/2006/main" prst="downArrow">
             <a:avLst/>
@@ -2591,22 +2956,105 @@
       </p:sp>
       <p:sp>
         <p:nvSpPr>
-          <p:cNvPr id="37" name="pore-label">
-            <a:extLst xmlns:a="http://schemas.openxmlformats.org/drawingml/2006/main">
-              <a:ext uri="{FF2B5EF4-FFF2-40B4-BE49-F238E27FC236}">
-                <a16:creationId xmlns:a16="http://schemas.microsoft.com/office/drawing/2014/main" id="{2E13AE03-E912-453B-A966-1E9C9D2721D4}"/>
-              </a:ext>
-            </a:extLst>
-          </p:cNvPr>
-          <p:cNvSpPr>
-            <a:spLocks xmlns:a="http://schemas.openxmlformats.org/drawingml/2006/main" noGrp="1"/>
-          </p:cNvSpPr>
-          <p:nvPr/>
-        </p:nvSpPr>
-        <p:spPr>
-          <a:xfrm xmlns:a="http://schemas.openxmlformats.org/drawingml/2006/main">
-            <a:off x="8534400" y="5905500"/>
-            <a:ext cx="1143000" cy="457200"/>
+          <p:cNvPr id="46" name="pore-label">
+            <a:extLst xmlns:a="http://schemas.openxmlformats.org/drawingml/2006/main">
+              <a:ext uri="{FF2B5EF4-FFF2-40B4-BE49-F238E27FC236}">
+                <a16:creationId xmlns:a16="http://schemas.microsoft.com/office/drawing/2014/main" id="{03560009-71DE-488C-826D-32CFF73B112C}"/>
+              </a:ext>
+            </a:extLst>
+          </p:cNvPr>
+          <p:cNvSpPr>
+            <a:spLocks xmlns:a="http://schemas.openxmlformats.org/drawingml/2006/main" noGrp="1"/>
+          </p:cNvSpPr>
+          <p:nvPr/>
+        </p:nvSpPr>
+        <p:spPr>
+          <a:xfrm xmlns:a="http://schemas.openxmlformats.org/drawingml/2006/main">
+            <a:off x="9925050" y="4600575"/>
+            <a:ext cx="1409700" cy="304800"/>
+          </a:xfrm>
+          <a:prstGeom xmlns:a="http://schemas.openxmlformats.org/drawingml/2006/main" prst="rect">
+            <a:avLst/>
+          </a:prstGeom>
+          <a:noFill xmlns:a="http://schemas.openxmlformats.org/drawingml/2006/main"/>
+          <a:ln xmlns:a="http://schemas.openxmlformats.org/drawingml/2006/main" w="0">
+            <a:noFill/>
+            <a:prstDash val="solid"/>
+          </a:ln>
+        </p:spPr>
+        <p:txBody>
+          <a:bodyPr xmlns:a="http://schemas.openxmlformats.org/drawingml/2006/main" anchor="ctr"/>
+          <a:lstStyle xmlns:a="http://schemas.openxmlformats.org/drawingml/2006/main"/>
+          <a:p xmlns:a="http://schemas.openxmlformats.org/drawingml/2006/main">
+            <a:pPr algn="l">
+              <a:defRPr sz="1200" b="1">
+                <a:solidFill>
+                  <a:srgbClr val="172033"/>
+                </a:solidFill>
+              </a:defRPr>
+            </a:pPr>
+            <a:r>
+              <a:rPr sz="1200" b="1">
+                <a:solidFill>
+                  <a:srgbClr val="172033"/>
+                </a:solidFill>
+              </a:rPr>
+              <a:t>Pore formation</a:t>
+            </a:r>
+          </a:p>
+        </p:txBody>
+      </p:sp>
+      <p:sp>
+        <p:nvSpPr>
+          <p:cNvPr id="47" name="nuclease-domain">
+            <a:extLst xmlns:a="http://schemas.openxmlformats.org/drawingml/2006/main">
+              <a:ext uri="{FF2B5EF4-FFF2-40B4-BE49-F238E27FC236}">
+                <a16:creationId xmlns:a16="http://schemas.microsoft.com/office/drawing/2014/main" id="{67388B5A-DB77-412F-9D47-1F943E75E4F9}"/>
+              </a:ext>
+            </a:extLst>
+          </p:cNvPr>
+          <p:cNvSpPr>
+            <a:spLocks xmlns:a="http://schemas.openxmlformats.org/drawingml/2006/main" noGrp="1"/>
+          </p:cNvSpPr>
+          <p:nvPr/>
+        </p:nvSpPr>
+        <p:spPr>
+          <a:xfrm xmlns:a="http://schemas.openxmlformats.org/drawingml/2006/main">
+            <a:off x="6210300" y="5524500"/>
+            <a:ext cx="628650" cy="514350"/>
+          </a:xfrm>
+          <a:prstGeom xmlns:a="http://schemas.openxmlformats.org/drawingml/2006/main" prst="ellipse">
+            <a:avLst/>
+          </a:prstGeom>
+          <a:solidFill xmlns:a="http://schemas.openxmlformats.org/drawingml/2006/main">
+            <a:srgbClr val="EE9B3B"/>
+          </a:solidFill>
+          <a:ln xmlns:a="http://schemas.openxmlformats.org/drawingml/2006/main" w="14288">
+            <a:solidFill>
+              <a:srgbClr val="B66B13"/>
+            </a:solidFill>
+            <a:prstDash val="solid"/>
+          </a:ln>
+        </p:spPr>
+      </p:sp>
+      <p:sp>
+        <p:nvSpPr>
+          <p:cNvPr id="48" name="nuclease-domain-label">
+            <a:extLst xmlns:a="http://schemas.openxmlformats.org/drawingml/2006/main">
+              <a:ext uri="{FF2B5EF4-FFF2-40B4-BE49-F238E27FC236}">
+                <a16:creationId xmlns:a16="http://schemas.microsoft.com/office/drawing/2014/main" id="{97F47C1F-9EEE-4984-90FD-32C7A1686FAF}"/>
+              </a:ext>
+            </a:extLst>
+          </p:cNvPr>
+          <p:cNvSpPr>
+            <a:spLocks xmlns:a="http://schemas.openxmlformats.org/drawingml/2006/main" noGrp="1"/>
+          </p:cNvSpPr>
+          <p:nvPr/>
+        </p:nvSpPr>
+        <p:spPr>
+          <a:xfrm xmlns:a="http://schemas.openxmlformats.org/drawingml/2006/main">
+            <a:off x="6210300" y="5581650"/>
+            <a:ext cx="628650" cy="400050"/>
           </a:xfrm>
           <a:prstGeom xmlns:a="http://schemas.openxmlformats.org/drawingml/2006/main" prst="rect">
             <a:avLst/>
@@ -2622,58 +3070,58 @@
           <a:lstStyle xmlns:a="http://schemas.openxmlformats.org/drawingml/2006/main"/>
           <a:p xmlns:a="http://schemas.openxmlformats.org/drawingml/2006/main">
             <a:pPr algn="ctr">
-              <a:defRPr sz="1200" b="1">
-                <a:solidFill>
-                  <a:srgbClr val="172033"/>
+              <a:defRPr sz="975" b="1">
+                <a:solidFill>
+                  <a:srgbClr val="FFFFFF"/>
                 </a:solidFill>
               </a:defRPr>
             </a:pPr>
             <a:r>
-              <a:rPr sz="1200" b="1">
-                <a:solidFill>
-                  <a:srgbClr val="172033"/>
+              <a:rPr sz="975" b="1">
+                <a:solidFill>
+                  <a:srgbClr val="FFFFFF"/>
                 </a:solidFill>
               </a:rPr>
-              <a:t>Pore</a:t>
+              <a:t>Killing</a:t>
             </a:r>
           </a:p>
           <a:p xmlns:a="http://schemas.openxmlformats.org/drawingml/2006/main">
             <a:pPr algn="ctr">
-              <a:defRPr sz="1200" b="1">
-                <a:solidFill>
-                  <a:srgbClr val="172033"/>
+              <a:defRPr sz="975" b="1">
+                <a:solidFill>
+                  <a:srgbClr val="FFFFFF"/>
                 </a:solidFill>
               </a:defRPr>
             </a:pPr>
             <a:r>
-              <a:rPr sz="1200" b="1">
-                <a:solidFill>
-                  <a:srgbClr val="172033"/>
+              <a:rPr sz="975" b="1">
+                <a:solidFill>
+                  <a:srgbClr val="FFFFFF"/>
                 </a:solidFill>
               </a:rPr>
-              <a:t>formation</a:t>
+              <a:t>domain</a:t>
             </a:r>
           </a:p>
         </p:txBody>
       </p:sp>
       <p:sp>
         <p:nvSpPr>
-          <p:cNvPr id="38" name="dna-left">
-            <a:extLst xmlns:a="http://schemas.openxmlformats.org/drawingml/2006/main">
-              <a:ext uri="{FF2B5EF4-FFF2-40B4-BE49-F238E27FC236}">
-                <a16:creationId xmlns:a16="http://schemas.microsoft.com/office/drawing/2014/main" id="{8C40F5E4-1B65-46F5-BBC7-76107894C3E6}"/>
-              </a:ext>
-            </a:extLst>
-          </p:cNvPr>
-          <p:cNvSpPr>
-            <a:spLocks xmlns:a="http://schemas.openxmlformats.org/drawingml/2006/main" noGrp="1"/>
-          </p:cNvSpPr>
-          <p:nvPr/>
-        </p:nvSpPr>
-        <p:spPr>
-          <a:xfrm xmlns:a="http://schemas.openxmlformats.org/drawingml/2006/main">
-            <a:off x="9906000" y="5467350"/>
-            <a:ext cx="361950" cy="114300"/>
+          <p:cNvPr id="49" name="dna-left">
+            <a:extLst xmlns:a="http://schemas.openxmlformats.org/drawingml/2006/main">
+              <a:ext uri="{FF2B5EF4-FFF2-40B4-BE49-F238E27FC236}">
+                <a16:creationId xmlns:a16="http://schemas.microsoft.com/office/drawing/2014/main" id="{D362A8A7-18A4-4E91-BADD-992DD1C7FAF1}"/>
+              </a:ext>
+            </a:extLst>
+          </p:cNvPr>
+          <p:cNvSpPr>
+            <a:spLocks xmlns:a="http://schemas.openxmlformats.org/drawingml/2006/main" noGrp="1"/>
+          </p:cNvSpPr>
+          <p:nvPr/>
+        </p:nvSpPr>
+        <p:spPr>
+          <a:xfrm xmlns:a="http://schemas.openxmlformats.org/drawingml/2006/main">
+            <a:off x="9086850" y="5676900"/>
+            <a:ext cx="400050" cy="114300"/>
           </a:xfrm>
           <a:prstGeom xmlns:a="http://schemas.openxmlformats.org/drawingml/2006/main" prst="roundRect">
             <a:avLst>
@@ -2693,22 +3141,22 @@
       </p:sp>
       <p:sp>
         <p:nvSpPr>
-          <p:cNvPr id="39" name="dna-right">
-            <a:extLst xmlns:a="http://schemas.openxmlformats.org/drawingml/2006/main">
-              <a:ext uri="{FF2B5EF4-FFF2-40B4-BE49-F238E27FC236}">
-                <a16:creationId xmlns:a16="http://schemas.microsoft.com/office/drawing/2014/main" id="{BF556210-D5FA-4156-A3B3-397CAB1FAE1E}"/>
-              </a:ext>
-            </a:extLst>
-          </p:cNvPr>
-          <p:cNvSpPr>
-            <a:spLocks xmlns:a="http://schemas.openxmlformats.org/drawingml/2006/main" noGrp="1"/>
-          </p:cNvSpPr>
-          <p:nvPr/>
-        </p:nvSpPr>
-        <p:spPr>
-          <a:xfrm xmlns:a="http://schemas.openxmlformats.org/drawingml/2006/main">
-            <a:off x="10496550" y="5467350"/>
-            <a:ext cx="361950" cy="114300"/>
+          <p:cNvPr id="50" name="dna-right">
+            <a:extLst xmlns:a="http://schemas.openxmlformats.org/drawingml/2006/main">
+              <a:ext uri="{FF2B5EF4-FFF2-40B4-BE49-F238E27FC236}">
+                <a16:creationId xmlns:a16="http://schemas.microsoft.com/office/drawing/2014/main" id="{08DC9414-2B1B-4958-A489-FB5C35C855DC}"/>
+              </a:ext>
+            </a:extLst>
+          </p:cNvPr>
+          <p:cNvSpPr>
+            <a:spLocks xmlns:a="http://schemas.openxmlformats.org/drawingml/2006/main" noGrp="1"/>
+          </p:cNvSpPr>
+          <p:nvPr/>
+        </p:nvSpPr>
+        <p:spPr>
+          <a:xfrm xmlns:a="http://schemas.openxmlformats.org/drawingml/2006/main">
+            <a:off x="9715500" y="5676900"/>
+            <a:ext cx="400050" cy="114300"/>
           </a:xfrm>
           <a:prstGeom xmlns:a="http://schemas.openxmlformats.org/drawingml/2006/main" prst="roundRect">
             <a:avLst>
@@ -2728,21 +3176,21 @@
       </p:sp>
       <p:sp>
         <p:nvSpPr>
-          <p:cNvPr id="40" name="cleavage-mark">
-            <a:extLst xmlns:a="http://schemas.openxmlformats.org/drawingml/2006/main">
-              <a:ext uri="{FF2B5EF4-FFF2-40B4-BE49-F238E27FC236}">
-                <a16:creationId xmlns:a16="http://schemas.microsoft.com/office/drawing/2014/main" id="{8BFA2CC1-38F6-4C20-8F34-9732AE4E192A}"/>
-              </a:ext>
-            </a:extLst>
-          </p:cNvPr>
-          <p:cNvSpPr>
-            <a:spLocks xmlns:a="http://schemas.openxmlformats.org/drawingml/2006/main" noGrp="1"/>
-          </p:cNvSpPr>
-          <p:nvPr/>
-        </p:nvSpPr>
-        <p:spPr>
-          <a:xfrm xmlns:a="http://schemas.openxmlformats.org/drawingml/2006/main">
-            <a:off x="10267950" y="5372100"/>
+          <p:cNvPr id="51" name="cleavage-mark">
+            <a:extLst xmlns:a="http://schemas.openxmlformats.org/drawingml/2006/main">
+              <a:ext uri="{FF2B5EF4-FFF2-40B4-BE49-F238E27FC236}">
+                <a16:creationId xmlns:a16="http://schemas.microsoft.com/office/drawing/2014/main" id="{11018863-8065-415C-B422-9AC88EC18A61}"/>
+              </a:ext>
+            </a:extLst>
+          </p:cNvPr>
+          <p:cNvSpPr>
+            <a:spLocks xmlns:a="http://schemas.openxmlformats.org/drawingml/2006/main" noGrp="1"/>
+          </p:cNvSpPr>
+          <p:nvPr/>
+        </p:nvSpPr>
+        <p:spPr>
+          <a:xfrm xmlns:a="http://schemas.openxmlformats.org/drawingml/2006/main">
+            <a:off x="9486900" y="5581650"/>
             <a:ext cx="228600" cy="304800"/>
           </a:xfrm>
           <a:prstGeom xmlns:a="http://schemas.openxmlformats.org/drawingml/2006/main" prst="ellipse">
@@ -2761,21 +3209,21 @@
       </p:sp>
       <p:sp>
         <p:nvSpPr>
-          <p:cNvPr id="41" name="cleavage-mark-label">
-            <a:extLst xmlns:a="http://schemas.openxmlformats.org/drawingml/2006/main">
-              <a:ext uri="{FF2B5EF4-FFF2-40B4-BE49-F238E27FC236}">
-                <a16:creationId xmlns:a16="http://schemas.microsoft.com/office/drawing/2014/main" id="{75F127BC-9286-49F2-A0DB-95CE559F3BDD}"/>
-              </a:ext>
-            </a:extLst>
-          </p:cNvPr>
-          <p:cNvSpPr>
-            <a:spLocks xmlns:a="http://schemas.openxmlformats.org/drawingml/2006/main" noGrp="1"/>
-          </p:cNvSpPr>
-          <p:nvPr/>
-        </p:nvSpPr>
-        <p:spPr>
-          <a:xfrm xmlns:a="http://schemas.openxmlformats.org/drawingml/2006/main">
-            <a:off x="10267950" y="5362575"/>
+          <p:cNvPr id="52" name="cleavage-mark-label">
+            <a:extLst xmlns:a="http://schemas.openxmlformats.org/drawingml/2006/main">
+              <a:ext uri="{FF2B5EF4-FFF2-40B4-BE49-F238E27FC236}">
+                <a16:creationId xmlns:a16="http://schemas.microsoft.com/office/drawing/2014/main" id="{2558DC34-D347-4507-BE82-B8BFDE305BB5}"/>
+              </a:ext>
+            </a:extLst>
+          </p:cNvPr>
+          <p:cNvSpPr>
+            <a:spLocks xmlns:a="http://schemas.openxmlformats.org/drawingml/2006/main" noGrp="1"/>
+          </p:cNvSpPr>
+          <p:nvPr/>
+        </p:nvSpPr>
+        <p:spPr>
+          <a:xfrm xmlns:a="http://schemas.openxmlformats.org/drawingml/2006/main">
+            <a:off x="9486900" y="5572125"/>
             <a:ext cx="228600" cy="285750"/>
           </a:xfrm>
           <a:prstGeom xmlns:a="http://schemas.openxmlformats.org/drawingml/2006/main" prst="rect">
@@ -2811,22 +3259,22 @@
       </p:sp>
       <p:sp>
         <p:nvSpPr>
-          <p:cNvPr id="42" name="nuclease-label">
-            <a:extLst xmlns:a="http://schemas.openxmlformats.org/drawingml/2006/main">
-              <a:ext uri="{FF2B5EF4-FFF2-40B4-BE49-F238E27FC236}">
-                <a16:creationId xmlns:a16="http://schemas.microsoft.com/office/drawing/2014/main" id="{D0AA24FC-663E-48A0-848E-7232BD73A51E}"/>
-              </a:ext>
-            </a:extLst>
-          </p:cNvPr>
-          <p:cNvSpPr>
-            <a:spLocks xmlns:a="http://schemas.openxmlformats.org/drawingml/2006/main" noGrp="1"/>
-          </p:cNvSpPr>
-          <p:nvPr/>
-        </p:nvSpPr>
-        <p:spPr>
-          <a:xfrm xmlns:a="http://schemas.openxmlformats.org/drawingml/2006/main">
-            <a:off x="9772650" y="5905500"/>
-            <a:ext cx="1219200" cy="457200"/>
+          <p:cNvPr id="53" name="nuclease-label">
+            <a:extLst xmlns:a="http://schemas.openxmlformats.org/drawingml/2006/main">
+              <a:ext uri="{FF2B5EF4-FFF2-40B4-BE49-F238E27FC236}">
+                <a16:creationId xmlns:a16="http://schemas.microsoft.com/office/drawing/2014/main" id="{30B480A1-7134-4AC0-9F42-159B4F11FBF3}"/>
+              </a:ext>
+            </a:extLst>
+          </p:cNvPr>
+          <p:cNvSpPr>
+            <a:spLocks xmlns:a="http://schemas.openxmlformats.org/drawingml/2006/main" noGrp="1"/>
+          </p:cNvSpPr>
+          <p:nvPr/>
+        </p:nvSpPr>
+        <p:spPr>
+          <a:xfrm xmlns:a="http://schemas.openxmlformats.org/drawingml/2006/main">
+            <a:off x="10287000" y="5581650"/>
+            <a:ext cx="1619250" cy="400050"/>
           </a:xfrm>
           <a:prstGeom xmlns:a="http://schemas.openxmlformats.org/drawingml/2006/main" prst="rect">
             <a:avLst/>
@@ -2841,7 +3289,7 @@
           <a:bodyPr xmlns:a="http://schemas.openxmlformats.org/drawingml/2006/main" anchor="ctr"/>
           <a:lstStyle xmlns:a="http://schemas.openxmlformats.org/drawingml/2006/main"/>
           <a:p xmlns:a="http://schemas.openxmlformats.org/drawingml/2006/main">
-            <a:pPr algn="ctr">
+            <a:pPr algn="l">
               <a:defRPr sz="1200" b="1">
                 <a:solidFill>
                   <a:srgbClr val="172033"/>
@@ -2854,231 +3302,15 @@
                   <a:srgbClr val="172033"/>
                 </a:solidFill>
               </a:rPr>
-              <a:t>DNA or RNA</a:t>
-            </a:r>
-          </a:p>
-          <a:p xmlns:a="http://schemas.openxmlformats.org/drawingml/2006/main">
-            <a:pPr algn="ctr">
-              <a:defRPr sz="1200" b="1">
-                <a:solidFill>
-                  <a:srgbClr val="172033"/>
-                </a:solidFill>
-              </a:defRPr>
-            </a:pPr>
-            <a:r>
-              <a:rPr sz="1200" b="1">
-                <a:solidFill>
-                  <a:srgbClr val="172033"/>
-                </a:solidFill>
-              </a:rPr>
-              <a:t>cleavage</a:t>
+              <a:t>DNA or RNA cleavage</a:t>
             </a:r>
           </a:p>
         </p:txBody>
       </p:sp>
-      <p:sp>
-        <p:nvSpPr>
-          <p:cNvPr id="43" name="brick-one">
-            <a:extLst xmlns:a="http://schemas.openxmlformats.org/drawingml/2006/main">
-              <a:ext uri="{FF2B5EF4-FFF2-40B4-BE49-F238E27FC236}">
-                <a16:creationId xmlns:a16="http://schemas.microsoft.com/office/drawing/2014/main" id="{D41B1BA5-7BFB-4FF0-83A4-CE584EE7F5FB}"/>
-              </a:ext>
-            </a:extLst>
-          </p:cNvPr>
-          <p:cNvSpPr>
-            <a:spLocks xmlns:a="http://schemas.openxmlformats.org/drawingml/2006/main" noGrp="1"/>
-          </p:cNvSpPr>
-          <p:nvPr/>
-        </p:nvSpPr>
-        <p:spPr>
-          <a:xfrm xmlns:a="http://schemas.openxmlformats.org/drawingml/2006/main">
-            <a:off x="11106150" y="5410200"/>
-            <a:ext cx="381000" cy="171450"/>
-          </a:xfrm>
-          <a:prstGeom xmlns:a="http://schemas.openxmlformats.org/drawingml/2006/main" prst="rect">
-            <a:avLst/>
-          </a:prstGeom>
-          <a:solidFill xmlns:a="http://schemas.openxmlformats.org/drawingml/2006/main">
-            <a:srgbClr val="D6A86C"/>
-          </a:solidFill>
-          <a:ln xmlns:a="http://schemas.openxmlformats.org/drawingml/2006/main" w="9525">
-            <a:solidFill>
-              <a:srgbClr val="8E622D"/>
-            </a:solidFill>
-            <a:prstDash val="solid"/>
-          </a:ln>
-        </p:spPr>
-      </p:sp>
-      <p:sp>
-        <p:nvSpPr>
-          <p:cNvPr id="44" name="brick-two">
-            <a:extLst xmlns:a="http://schemas.openxmlformats.org/drawingml/2006/main">
-              <a:ext uri="{FF2B5EF4-FFF2-40B4-BE49-F238E27FC236}">
-                <a16:creationId xmlns:a16="http://schemas.microsoft.com/office/drawing/2014/main" id="{783869A3-7C3A-4E36-9C14-3E252D639FED}"/>
-              </a:ext>
-            </a:extLst>
-          </p:cNvPr>
-          <p:cNvSpPr>
-            <a:spLocks xmlns:a="http://schemas.openxmlformats.org/drawingml/2006/main" noGrp="1"/>
-          </p:cNvSpPr>
-          <p:nvPr/>
-        </p:nvSpPr>
-        <p:spPr>
-          <a:xfrm xmlns:a="http://schemas.openxmlformats.org/drawingml/2006/main">
-            <a:off x="11506200" y="5410200"/>
-            <a:ext cx="381000" cy="171450"/>
-          </a:xfrm>
-          <a:prstGeom xmlns:a="http://schemas.openxmlformats.org/drawingml/2006/main" prst="rect">
-            <a:avLst/>
-          </a:prstGeom>
-          <a:solidFill xmlns:a="http://schemas.openxmlformats.org/drawingml/2006/main">
-            <a:srgbClr val="D6A86C"/>
-          </a:solidFill>
-          <a:ln xmlns:a="http://schemas.openxmlformats.org/drawingml/2006/main" w="9525">
-            <a:solidFill>
-              <a:srgbClr val="8E622D"/>
-            </a:solidFill>
-            <a:prstDash val="solid"/>
-          </a:ln>
-        </p:spPr>
-      </p:sp>
-      <p:sp>
-        <p:nvSpPr>
-          <p:cNvPr id="45" name="brick-three">
-            <a:extLst xmlns:a="http://schemas.openxmlformats.org/drawingml/2006/main">
-              <a:ext uri="{FF2B5EF4-FFF2-40B4-BE49-F238E27FC236}">
-                <a16:creationId xmlns:a16="http://schemas.microsoft.com/office/drawing/2014/main" id="{9195EADE-A391-41EB-939B-7AAF24EA8B77}"/>
-              </a:ext>
-            </a:extLst>
-          </p:cNvPr>
-          <p:cNvSpPr>
-            <a:spLocks xmlns:a="http://schemas.openxmlformats.org/drawingml/2006/main" noGrp="1"/>
-          </p:cNvSpPr>
-          <p:nvPr/>
-        </p:nvSpPr>
-        <p:spPr>
-          <a:xfrm xmlns:a="http://schemas.openxmlformats.org/drawingml/2006/main">
-            <a:off x="10906125" y="5610225"/>
-            <a:ext cx="381000" cy="171450"/>
-          </a:xfrm>
-          <a:prstGeom xmlns:a="http://schemas.openxmlformats.org/drawingml/2006/main" prst="rect">
-            <a:avLst/>
-          </a:prstGeom>
-          <a:solidFill xmlns:a="http://schemas.openxmlformats.org/drawingml/2006/main">
-            <a:srgbClr val="D6A86C"/>
-          </a:solidFill>
-          <a:ln xmlns:a="http://schemas.openxmlformats.org/drawingml/2006/main" w="9525">
-            <a:solidFill>
-              <a:srgbClr val="8E622D"/>
-            </a:solidFill>
-            <a:prstDash val="solid"/>
-          </a:ln>
-        </p:spPr>
-      </p:sp>
-      <p:sp>
-        <p:nvSpPr>
-          <p:cNvPr id="46" name="missing-brick">
-            <a:extLst xmlns:a="http://schemas.openxmlformats.org/drawingml/2006/main">
-              <a:ext uri="{FF2B5EF4-FFF2-40B4-BE49-F238E27FC236}">
-                <a16:creationId xmlns:a16="http://schemas.microsoft.com/office/drawing/2014/main" id="{1DDE90A2-329E-40B3-BCBD-33738B785DB7}"/>
-              </a:ext>
-            </a:extLst>
-          </p:cNvPr>
-          <p:cNvSpPr>
-            <a:spLocks xmlns:a="http://schemas.openxmlformats.org/drawingml/2006/main" noGrp="1"/>
-          </p:cNvSpPr>
-          <p:nvPr/>
-        </p:nvSpPr>
-        <p:spPr>
-          <a:xfrm xmlns:a="http://schemas.openxmlformats.org/drawingml/2006/main">
-            <a:off x="11306175" y="5610225"/>
-            <a:ext cx="381000" cy="171450"/>
-          </a:xfrm>
-          <a:prstGeom xmlns:a="http://schemas.openxmlformats.org/drawingml/2006/main" prst="rect">
-            <a:avLst/>
-          </a:prstGeom>
-          <a:solidFill xmlns:a="http://schemas.openxmlformats.org/drawingml/2006/main">
-            <a:srgbClr val="FFFFFF"/>
-          </a:solidFill>
-          <a:ln xmlns:a="http://schemas.openxmlformats.org/drawingml/2006/main" w="19050">
-            <a:solidFill>
-              <a:srgbClr val="D94B4B"/>
-            </a:solidFill>
-            <a:prstDash val="solid"/>
-          </a:ln>
-        </p:spPr>
-      </p:sp>
-      <p:sp>
-        <p:nvSpPr>
-          <p:cNvPr id="47" name="wall-label">
-            <a:extLst xmlns:a="http://schemas.openxmlformats.org/drawingml/2006/main">
-              <a:ext uri="{FF2B5EF4-FFF2-40B4-BE49-F238E27FC236}">
-                <a16:creationId xmlns:a16="http://schemas.microsoft.com/office/drawing/2014/main" id="{9415577E-34C6-49AE-9D58-ADA36ACC0111}"/>
-              </a:ext>
-            </a:extLst>
-          </p:cNvPr>
-          <p:cNvSpPr>
-            <a:spLocks xmlns:a="http://schemas.openxmlformats.org/drawingml/2006/main" noGrp="1"/>
-          </p:cNvSpPr>
-          <p:nvPr/>
-        </p:nvSpPr>
-        <p:spPr>
-          <a:xfrm xmlns:a="http://schemas.openxmlformats.org/drawingml/2006/main">
-            <a:off x="10858500" y="5905500"/>
-            <a:ext cx="1104900" cy="457200"/>
-          </a:xfrm>
-          <a:prstGeom xmlns:a="http://schemas.openxmlformats.org/drawingml/2006/main" prst="rect">
-            <a:avLst/>
-          </a:prstGeom>
-          <a:noFill xmlns:a="http://schemas.openxmlformats.org/drawingml/2006/main"/>
-          <a:ln xmlns:a="http://schemas.openxmlformats.org/drawingml/2006/main" w="0">
-            <a:noFill/>
-            <a:prstDash val="solid"/>
-          </a:ln>
-        </p:spPr>
-        <p:txBody>
-          <a:bodyPr xmlns:a="http://schemas.openxmlformats.org/drawingml/2006/main" anchor="ctr"/>
-          <a:lstStyle xmlns:a="http://schemas.openxmlformats.org/drawingml/2006/main"/>
-          <a:p xmlns:a="http://schemas.openxmlformats.org/drawingml/2006/main">
-            <a:pPr algn="ctr">
-              <a:defRPr sz="1200" b="1">
-                <a:solidFill>
-                  <a:srgbClr val="172033"/>
-                </a:solidFill>
-              </a:defRPr>
-            </a:pPr>
-            <a:r>
-              <a:rPr sz="1200" b="1">
-                <a:solidFill>
-                  <a:srgbClr val="172033"/>
-                </a:solidFill>
-              </a:rPr>
-              <a:t>Peptidoglycan</a:t>
-            </a:r>
-          </a:p>
-          <a:p xmlns:a="http://schemas.openxmlformats.org/drawingml/2006/main">
-            <a:pPr algn="ctr">
-              <a:defRPr sz="1200" b="1">
-                <a:solidFill>
-                  <a:srgbClr val="172033"/>
-                </a:solidFill>
-              </a:defRPr>
-            </a:pPr>
-            <a:r>
-              <a:rPr sz="1200" b="1">
-                <a:solidFill>
-                  <a:srgbClr val="172033"/>
-                </a:solidFill>
-              </a:rPr>
-              <a:t>damage</a:t>
-            </a:r>
-          </a:p>
-        </p:txBody>
-      </p:sp>
     </p:spTree>
     <p:extLst>
       <p:ext uri="{BB962C8B-B14F-4D97-AF65-F5344CB8AC3E}">
-        <p14:creationId xmlns:p14="http://schemas.microsoft.com/office/powerpoint/2010/main" val="2127150927"/>
+        <p14:creationId xmlns:p14="http://schemas.microsoft.com/office/powerpoint/2010/main" val="1765617845"/>
       </p:ext>
     </p:extLst>
   </p:cSld>
